--- a/docs/slides/pdbthink-results-2026-09-08.pptx
+++ b/docs/slides/pdbthink-results-2026-09-08.pptx
@@ -4519,7 +4519,7 @@
               </a:spcAft>
             </a:pPr>
             <a:r>
-              <a:rPr sz="1000" b="1" i="0" spc="120">
+              <a:rPr sz="950" b="1" i="0" spc="100">
                 <a:solidFill>
                   <a:srgbClr val="5B6E7A"/>
                 </a:solidFill>
@@ -4558,7 +4558,7 @@
               </a:spcAft>
             </a:pPr>
             <a:r>
-              <a:rPr sz="1000" b="1" i="0" spc="120">
+              <a:rPr sz="950" b="1" i="0" spc="100">
                 <a:solidFill>
                   <a:srgbClr val="5B6E7A"/>
                 </a:solidFill>
@@ -4597,7 +4597,7 @@
               </a:spcAft>
             </a:pPr>
             <a:r>
-              <a:rPr sz="1000" b="1" i="0" spc="120">
+              <a:rPr sz="950" b="1" i="0" spc="100">
                 <a:solidFill>
                   <a:srgbClr val="5B6E7A"/>
                 </a:solidFill>
@@ -4636,7 +4636,7 @@
               </a:spcAft>
             </a:pPr>
             <a:r>
-              <a:rPr sz="1000" b="1" i="0" spc="120">
+              <a:rPr sz="950" b="1" i="0" spc="100">
                 <a:solidFill>
                   <a:srgbClr val="5B6E7A"/>
                 </a:solidFill>
@@ -4675,7 +4675,7 @@
               </a:spcAft>
             </a:pPr>
             <a:r>
-              <a:rPr sz="1000" b="1" i="0" spc="120">
+              <a:rPr sz="950" b="1" i="0" spc="100">
                 <a:solidFill>
                   <a:srgbClr val="5B6E7A"/>
                 </a:solidFill>
@@ -4694,7 +4694,7 @@
         </p:nvSpPr>
         <p:spPr>
           <a:xfrm>
-            <a:off x="8915400" y="2514600"/>
+            <a:off x="8732519" y="2514600"/>
             <a:ext cx="2194560" cy="274320"/>
           </a:xfrm>
           <a:prstGeom prst="rect">
@@ -4714,13 +4714,13 @@
               </a:spcAft>
             </a:pPr>
             <a:r>
-              <a:rPr sz="1000" b="1" i="0" spc="120">
+              <a:rPr sz="950" b="1" i="0" spc="100">
                 <a:solidFill>
                   <a:srgbClr val="5B6E7A"/>
                 </a:solidFill>
                 <a:latin typeface="Calibri"/>
               </a:rPr>
-              <a:t>STILL CUT OFF</a:t>
+              <a:t>CUT OFF IN TIER</a:t>
             </a:r>
           </a:p>
         </p:txBody>
@@ -4728,6 +4728,45 @@
       <p:sp>
         <p:nvSpPr>
           <p:cNvPr id="12" name="TextBox 11"/>
+          <p:cNvSpPr txBox="1"/>
+          <p:nvPr/>
+        </p:nvSpPr>
+        <p:spPr>
+          <a:xfrm>
+            <a:off x="10104119" y="2514600"/>
+            <a:ext cx="2194560" cy="274320"/>
+          </a:xfrm>
+          <a:prstGeom prst="rect">
+            <a:avLst/>
+          </a:prstGeom>
+          <a:noFill/>
+        </p:spPr>
+        <p:txBody>
+          <a:bodyPr wrap="square" lIns="0" rIns="0" tIns="0" bIns="0" anchor="t">
+            <a:spAutoFit/>
+          </a:bodyPr>
+          <a:lstStyle/>
+          <a:p>
+            <a:pPr algn="l">
+              <a:spcAft>
+                <a:spcPts val="0"/>
+              </a:spcAft>
+            </a:pPr>
+            <a:r>
+              <a:rPr sz="950" b="1" i="0" spc="100">
+                <a:solidFill>
+                  <a:srgbClr val="5B6E7A"/>
+                </a:solidFill>
+                <a:latin typeface="Calibri"/>
+              </a:rPr>
+              <a:t>CUT OFF OVERALL</a:t>
+            </a:r>
+          </a:p>
+        </p:txBody>
+      </p:sp>
+      <p:sp>
+        <p:nvSpPr>
+          <p:cNvPr id="13" name="TextBox 12"/>
           <p:cNvSpPr txBox="1"/>
           <p:nvPr/>
         </p:nvSpPr>
@@ -4766,7 +4805,7 @@
       </p:sp>
       <p:sp>
         <p:nvSpPr>
-          <p:cNvPr id="13" name="TextBox 12"/>
+          <p:cNvPr id="14" name="TextBox 13"/>
           <p:cNvSpPr txBox="1"/>
           <p:nvPr/>
         </p:nvSpPr>
@@ -4805,7 +4844,7 @@
       </p:sp>
       <p:sp>
         <p:nvSpPr>
-          <p:cNvPr id="14" name="TextBox 13"/>
+          <p:cNvPr id="15" name="TextBox 14"/>
           <p:cNvSpPr txBox="1"/>
           <p:nvPr/>
         </p:nvSpPr>
@@ -4844,7 +4883,7 @@
       </p:sp>
       <p:sp>
         <p:nvSpPr>
-          <p:cNvPr id="15" name="TextBox 14"/>
+          <p:cNvPr id="16" name="TextBox 15"/>
           <p:cNvSpPr txBox="1"/>
           <p:nvPr/>
         </p:nvSpPr>
@@ -4883,7 +4922,7 @@
       </p:sp>
       <p:sp>
         <p:nvSpPr>
-          <p:cNvPr id="16" name="TextBox 15"/>
+          <p:cNvPr id="17" name="TextBox 16"/>
           <p:cNvSpPr txBox="1"/>
           <p:nvPr/>
         </p:nvSpPr>
@@ -4922,13 +4961,52 @@
       </p:sp>
       <p:sp>
         <p:nvSpPr>
-          <p:cNvPr id="17" name="TextBox 16"/>
-          <p:cNvSpPr txBox="1"/>
-          <p:nvPr/>
-        </p:nvSpPr>
-        <p:spPr>
-          <a:xfrm>
-            <a:off x="8915400" y="2880360"/>
+          <p:cNvPr id="18" name="TextBox 17"/>
+          <p:cNvSpPr txBox="1"/>
+          <p:nvPr/>
+        </p:nvSpPr>
+        <p:spPr>
+          <a:xfrm>
+            <a:off x="8732520" y="2880360"/>
+            <a:ext cx="1188720" cy="310896"/>
+          </a:xfrm>
+          <a:prstGeom prst="rect">
+            <a:avLst/>
+          </a:prstGeom>
+          <a:noFill/>
+        </p:spPr>
+        <p:txBody>
+          <a:bodyPr wrap="square" lIns="0" rIns="0" tIns="0" bIns="0" anchor="t">
+            <a:spAutoFit/>
+          </a:bodyPr>
+          <a:lstStyle/>
+          <a:p>
+            <a:pPr algn="l">
+              <a:spcAft>
+                <a:spcPts val="0"/>
+              </a:spcAft>
+            </a:pPr>
+            <a:r>
+              <a:rPr sz="1300" b="0" i="0">
+                <a:solidFill>
+                  <a:srgbClr val="AFC3CE"/>
+                </a:solidFill>
+                <a:latin typeface="Consolas"/>
+              </a:rPr>
+              <a:t>11/47</a:t>
+            </a:r>
+          </a:p>
+        </p:txBody>
+      </p:sp>
+      <p:sp>
+        <p:nvSpPr>
+          <p:cNvPr id="19" name="TextBox 18"/>
+          <p:cNvSpPr txBox="1"/>
+          <p:nvPr/>
+        </p:nvSpPr>
+        <p:spPr>
+          <a:xfrm>
+            <a:off x="10104120" y="2880360"/>
             <a:ext cx="1463040" cy="310896"/>
           </a:xfrm>
           <a:prstGeom prst="rect">
@@ -4950,18 +5028,18 @@
             <a:r>
               <a:rPr sz="1300" b="0" i="0">
                 <a:solidFill>
-                  <a:srgbClr val="AFC3CE"/>
-                </a:solidFill>
-                <a:latin typeface="Consolas"/>
-              </a:rPr>
-              <a:t>11/47</a:t>
-            </a:r>
-          </a:p>
-        </p:txBody>
-      </p:sp>
-      <p:sp>
-        <p:nvSpPr>
-          <p:cNvPr id="18" name="TextBox 17"/>
+                  <a:srgbClr val="5B6E7A"/>
+                </a:solidFill>
+                <a:latin typeface="Consolas"/>
+              </a:rPr>
+              <a:t>24/247</a:t>
+            </a:r>
+          </a:p>
+        </p:txBody>
+      </p:sp>
+      <p:sp>
+        <p:nvSpPr>
+          <p:cNvPr id="20" name="TextBox 19"/>
           <p:cNvSpPr txBox="1"/>
           <p:nvPr/>
         </p:nvSpPr>
@@ -5000,7 +5078,7 @@
       </p:sp>
       <p:sp>
         <p:nvSpPr>
-          <p:cNvPr id="19" name="TextBox 18"/>
+          <p:cNvPr id="21" name="TextBox 20"/>
           <p:cNvSpPr txBox="1"/>
           <p:nvPr/>
         </p:nvSpPr>
@@ -5039,7 +5117,7 @@
       </p:sp>
       <p:sp>
         <p:nvSpPr>
-          <p:cNvPr id="20" name="TextBox 19"/>
+          <p:cNvPr id="22" name="TextBox 21"/>
           <p:cNvSpPr txBox="1"/>
           <p:nvPr/>
         </p:nvSpPr>
@@ -5078,7 +5156,7 @@
       </p:sp>
       <p:sp>
         <p:nvSpPr>
-          <p:cNvPr id="21" name="TextBox 20"/>
+          <p:cNvPr id="23" name="TextBox 22"/>
           <p:cNvSpPr txBox="1"/>
           <p:nvPr/>
         </p:nvSpPr>
@@ -5117,7 +5195,7 @@
       </p:sp>
       <p:sp>
         <p:nvSpPr>
-          <p:cNvPr id="22" name="TextBox 21"/>
+          <p:cNvPr id="24" name="TextBox 23"/>
           <p:cNvSpPr txBox="1"/>
           <p:nvPr/>
         </p:nvSpPr>
@@ -5156,13 +5234,52 @@
       </p:sp>
       <p:sp>
         <p:nvSpPr>
-          <p:cNvPr id="23" name="TextBox 22"/>
-          <p:cNvSpPr txBox="1"/>
-          <p:nvPr/>
-        </p:nvSpPr>
-        <p:spPr>
-          <a:xfrm>
-            <a:off x="8915400" y="3246120"/>
+          <p:cNvPr id="25" name="TextBox 24"/>
+          <p:cNvSpPr txBox="1"/>
+          <p:nvPr/>
+        </p:nvSpPr>
+        <p:spPr>
+          <a:xfrm>
+            <a:off x="8732520" y="3246120"/>
+            <a:ext cx="1188720" cy="310896"/>
+          </a:xfrm>
+          <a:prstGeom prst="rect">
+            <a:avLst/>
+          </a:prstGeom>
+          <a:noFill/>
+        </p:spPr>
+        <p:txBody>
+          <a:bodyPr wrap="square" lIns="0" rIns="0" tIns="0" bIns="0" anchor="t">
+            <a:spAutoFit/>
+          </a:bodyPr>
+          <a:lstStyle/>
+          <a:p>
+            <a:pPr algn="l">
+              <a:spcAft>
+                <a:spcPts val="0"/>
+              </a:spcAft>
+            </a:pPr>
+            <a:r>
+              <a:rPr sz="1300" b="0" i="0">
+                <a:solidFill>
+                  <a:srgbClr val="AFC3CE"/>
+                </a:solidFill>
+                <a:latin typeface="Consolas"/>
+              </a:rPr>
+              <a:t>0/10</a:t>
+            </a:r>
+          </a:p>
+        </p:txBody>
+      </p:sp>
+      <p:sp>
+        <p:nvSpPr>
+          <p:cNvPr id="26" name="TextBox 25"/>
+          <p:cNvSpPr txBox="1"/>
+          <p:nvPr/>
+        </p:nvSpPr>
+        <p:spPr>
+          <a:xfrm>
+            <a:off x="10104120" y="3246120"/>
             <a:ext cx="1463040" cy="310896"/>
           </a:xfrm>
           <a:prstGeom prst="rect">
@@ -5184,18 +5301,18 @@
             <a:r>
               <a:rPr sz="1300" b="0" i="0">
                 <a:solidFill>
-                  <a:srgbClr val="AFC3CE"/>
-                </a:solidFill>
-                <a:latin typeface="Consolas"/>
-              </a:rPr>
-              <a:t>0/10</a:t>
-            </a:r>
-          </a:p>
-        </p:txBody>
-      </p:sp>
-      <p:sp>
-        <p:nvSpPr>
-          <p:cNvPr id="24" name="TextBox 23"/>
+                  <a:srgbClr val="5B6E7A"/>
+                </a:solidFill>
+                <a:latin typeface="Consolas"/>
+              </a:rPr>
+              <a:t>14/247</a:t>
+            </a:r>
+          </a:p>
+        </p:txBody>
+      </p:sp>
+      <p:sp>
+        <p:nvSpPr>
+          <p:cNvPr id="27" name="TextBox 26"/>
           <p:cNvSpPr txBox="1"/>
           <p:nvPr/>
         </p:nvSpPr>
@@ -5234,7 +5351,7 @@
       </p:sp>
       <p:sp>
         <p:nvSpPr>
-          <p:cNvPr id="25" name="TextBox 24"/>
+          <p:cNvPr id="28" name="TextBox 27"/>
           <p:cNvSpPr txBox="1"/>
           <p:nvPr/>
         </p:nvSpPr>
@@ -5273,7 +5390,7 @@
       </p:sp>
       <p:sp>
         <p:nvSpPr>
-          <p:cNvPr id="26" name="TextBox 25"/>
+          <p:cNvPr id="29" name="TextBox 28"/>
           <p:cNvSpPr txBox="1"/>
           <p:nvPr/>
         </p:nvSpPr>
@@ -5312,7 +5429,7 @@
       </p:sp>
       <p:sp>
         <p:nvSpPr>
-          <p:cNvPr id="27" name="TextBox 26"/>
+          <p:cNvPr id="30" name="TextBox 29"/>
           <p:cNvSpPr txBox="1"/>
           <p:nvPr/>
         </p:nvSpPr>
@@ -5351,7 +5468,7 @@
       </p:sp>
       <p:sp>
         <p:nvSpPr>
-          <p:cNvPr id="28" name="TextBox 27"/>
+          <p:cNvPr id="31" name="TextBox 30"/>
           <p:cNvSpPr txBox="1"/>
           <p:nvPr/>
         </p:nvSpPr>
@@ -5390,13 +5507,52 @@
       </p:sp>
       <p:sp>
         <p:nvSpPr>
-          <p:cNvPr id="29" name="TextBox 28"/>
-          <p:cNvSpPr txBox="1"/>
-          <p:nvPr/>
-        </p:nvSpPr>
-        <p:spPr>
-          <a:xfrm>
-            <a:off x="8915400" y="3611879"/>
+          <p:cNvPr id="32" name="TextBox 31"/>
+          <p:cNvSpPr txBox="1"/>
+          <p:nvPr/>
+        </p:nvSpPr>
+        <p:spPr>
+          <a:xfrm>
+            <a:off x="8732520" y="3611879"/>
+            <a:ext cx="1188720" cy="310896"/>
+          </a:xfrm>
+          <a:prstGeom prst="rect">
+            <a:avLst/>
+          </a:prstGeom>
+          <a:noFill/>
+        </p:spPr>
+        <p:txBody>
+          <a:bodyPr wrap="square" lIns="0" rIns="0" tIns="0" bIns="0" anchor="t">
+            <a:spAutoFit/>
+          </a:bodyPr>
+          <a:lstStyle/>
+          <a:p>
+            <a:pPr algn="l">
+              <a:spcAft>
+                <a:spcPts val="0"/>
+              </a:spcAft>
+            </a:pPr>
+            <a:r>
+              <a:rPr sz="1300" b="0" i="0">
+                <a:solidFill>
+                  <a:srgbClr val="AFC3CE"/>
+                </a:solidFill>
+                <a:latin typeface="Consolas"/>
+              </a:rPr>
+              <a:t>4/31</a:t>
+            </a:r>
+          </a:p>
+        </p:txBody>
+      </p:sp>
+      <p:sp>
+        <p:nvSpPr>
+          <p:cNvPr id="33" name="TextBox 32"/>
+          <p:cNvSpPr txBox="1"/>
+          <p:nvPr/>
+        </p:nvSpPr>
+        <p:spPr>
+          <a:xfrm>
+            <a:off x="10104120" y="3611879"/>
             <a:ext cx="1463040" cy="310896"/>
           </a:xfrm>
           <a:prstGeom prst="rect">
@@ -5418,18 +5574,18 @@
             <a:r>
               <a:rPr sz="1300" b="0" i="0">
                 <a:solidFill>
-                  <a:srgbClr val="AFC3CE"/>
-                </a:solidFill>
-                <a:latin typeface="Consolas"/>
-              </a:rPr>
-              <a:t>4/31</a:t>
-            </a:r>
-          </a:p>
-        </p:txBody>
-      </p:sp>
-      <p:sp>
-        <p:nvSpPr>
-          <p:cNvPr id="30" name="TextBox 29"/>
+                  <a:srgbClr val="5B6E7A"/>
+                </a:solidFill>
+                <a:latin typeface="Consolas"/>
+              </a:rPr>
+              <a:t>75/247</a:t>
+            </a:r>
+          </a:p>
+        </p:txBody>
+      </p:sp>
+      <p:sp>
+        <p:nvSpPr>
+          <p:cNvPr id="34" name="TextBox 33"/>
           <p:cNvSpPr txBox="1"/>
           <p:nvPr/>
         </p:nvSpPr>
@@ -5468,7 +5624,7 @@
       </p:sp>
       <p:sp>
         <p:nvSpPr>
-          <p:cNvPr id="31" name="TextBox 30"/>
+          <p:cNvPr id="35" name="TextBox 34"/>
           <p:cNvSpPr txBox="1"/>
           <p:nvPr/>
         </p:nvSpPr>
@@ -5507,7 +5663,7 @@
       </p:sp>
       <p:sp>
         <p:nvSpPr>
-          <p:cNvPr id="32" name="TextBox 31"/>
+          <p:cNvPr id="36" name="TextBox 35"/>
           <p:cNvSpPr txBox="1"/>
           <p:nvPr/>
         </p:nvSpPr>
@@ -5546,7 +5702,7 @@
       </p:sp>
       <p:sp>
         <p:nvSpPr>
-          <p:cNvPr id="33" name="TextBox 32"/>
+          <p:cNvPr id="37" name="TextBox 36"/>
           <p:cNvSpPr txBox="1"/>
           <p:nvPr/>
         </p:nvSpPr>
@@ -5585,7 +5741,7 @@
       </p:sp>
       <p:sp>
         <p:nvSpPr>
-          <p:cNvPr id="34" name="TextBox 33"/>
+          <p:cNvPr id="38" name="TextBox 37"/>
           <p:cNvSpPr txBox="1"/>
           <p:nvPr/>
         </p:nvSpPr>
@@ -5624,13 +5780,52 @@
       </p:sp>
       <p:sp>
         <p:nvSpPr>
-          <p:cNvPr id="35" name="TextBox 34"/>
-          <p:cNvSpPr txBox="1"/>
-          <p:nvPr/>
-        </p:nvSpPr>
-        <p:spPr>
-          <a:xfrm>
-            <a:off x="8915400" y="3977639"/>
+          <p:cNvPr id="39" name="TextBox 38"/>
+          <p:cNvSpPr txBox="1"/>
+          <p:nvPr/>
+        </p:nvSpPr>
+        <p:spPr>
+          <a:xfrm>
+            <a:off x="8732520" y="3977639"/>
+            <a:ext cx="1188720" cy="310896"/>
+          </a:xfrm>
+          <a:prstGeom prst="rect">
+            <a:avLst/>
+          </a:prstGeom>
+          <a:noFill/>
+        </p:spPr>
+        <p:txBody>
+          <a:bodyPr wrap="square" lIns="0" rIns="0" tIns="0" bIns="0" anchor="t">
+            <a:spAutoFit/>
+          </a:bodyPr>
+          <a:lstStyle/>
+          <a:p>
+            <a:pPr algn="l">
+              <a:spcAft>
+                <a:spcPts val="0"/>
+              </a:spcAft>
+            </a:pPr>
+            <a:r>
+              <a:rPr sz="1300" b="0" i="0">
+                <a:solidFill>
+                  <a:srgbClr val="AFC3CE"/>
+                </a:solidFill>
+                <a:latin typeface="Consolas"/>
+              </a:rPr>
+              <a:t>0/26</a:t>
+            </a:r>
+          </a:p>
+        </p:txBody>
+      </p:sp>
+      <p:sp>
+        <p:nvSpPr>
+          <p:cNvPr id="40" name="TextBox 39"/>
+          <p:cNvSpPr txBox="1"/>
+          <p:nvPr/>
+        </p:nvSpPr>
+        <p:spPr>
+          <a:xfrm>
+            <a:off x="10104120" y="3977639"/>
             <a:ext cx="1463040" cy="310896"/>
           </a:xfrm>
           <a:prstGeom prst="rect">
@@ -5652,18 +5847,18 @@
             <a:r>
               <a:rPr sz="1300" b="0" i="0">
                 <a:solidFill>
-                  <a:srgbClr val="AFC3CE"/>
-                </a:solidFill>
-                <a:latin typeface="Consolas"/>
-              </a:rPr>
-              <a:t>0/26</a:t>
-            </a:r>
-          </a:p>
-        </p:txBody>
-      </p:sp>
-      <p:sp>
-        <p:nvSpPr>
-          <p:cNvPr id="36" name="TextBox 35"/>
+                  <a:srgbClr val="5B6E7A"/>
+                </a:solidFill>
+                <a:latin typeface="Consolas"/>
+              </a:rPr>
+              <a:t>133/246</a:t>
+            </a:r>
+          </a:p>
+        </p:txBody>
+      </p:sp>
+      <p:sp>
+        <p:nvSpPr>
+          <p:cNvPr id="41" name="TextBox 40"/>
           <p:cNvSpPr txBox="1"/>
           <p:nvPr/>
         </p:nvSpPr>
@@ -5702,7 +5897,7 @@
       </p:sp>
       <p:sp>
         <p:nvSpPr>
-          <p:cNvPr id="37" name="TextBox 36"/>
+          <p:cNvPr id="42" name="TextBox 41"/>
           <p:cNvSpPr txBox="1"/>
           <p:nvPr/>
         </p:nvSpPr>
@@ -5741,7 +5936,7 @@
       </p:sp>
       <p:sp>
         <p:nvSpPr>
-          <p:cNvPr id="38" name="TextBox 37"/>
+          <p:cNvPr id="43" name="TextBox 42"/>
           <p:cNvSpPr txBox="1"/>
           <p:nvPr/>
         </p:nvSpPr>
@@ -5780,7 +5975,7 @@
       </p:sp>
       <p:sp>
         <p:nvSpPr>
-          <p:cNvPr id="39" name="TextBox 38"/>
+          <p:cNvPr id="44" name="TextBox 43"/>
           <p:cNvSpPr txBox="1"/>
           <p:nvPr/>
         </p:nvSpPr>
@@ -5819,7 +6014,7 @@
       </p:sp>
       <p:sp>
         <p:nvSpPr>
-          <p:cNvPr id="40" name="TextBox 39"/>
+          <p:cNvPr id="45" name="TextBox 44"/>
           <p:cNvSpPr txBox="1"/>
           <p:nvPr/>
         </p:nvSpPr>
@@ -5858,13 +6053,52 @@
       </p:sp>
       <p:sp>
         <p:nvSpPr>
-          <p:cNvPr id="41" name="TextBox 40"/>
-          <p:cNvSpPr txBox="1"/>
-          <p:nvPr/>
-        </p:nvSpPr>
-        <p:spPr>
-          <a:xfrm>
-            <a:off x="8915400" y="4343400"/>
+          <p:cNvPr id="46" name="TextBox 45"/>
+          <p:cNvSpPr txBox="1"/>
+          <p:nvPr/>
+        </p:nvSpPr>
+        <p:spPr>
+          <a:xfrm>
+            <a:off x="8732520" y="4343400"/>
+            <a:ext cx="1188720" cy="310896"/>
+          </a:xfrm>
+          <a:prstGeom prst="rect">
+            <a:avLst/>
+          </a:prstGeom>
+          <a:noFill/>
+        </p:spPr>
+        <p:txBody>
+          <a:bodyPr wrap="square" lIns="0" rIns="0" tIns="0" bIns="0" anchor="t">
+            <a:spAutoFit/>
+          </a:bodyPr>
+          <a:lstStyle/>
+          <a:p>
+            <a:pPr algn="l">
+              <a:spcAft>
+                <a:spcPts val="0"/>
+              </a:spcAft>
+            </a:pPr>
+            <a:r>
+              <a:rPr sz="1300" b="0" i="0">
+                <a:solidFill>
+                  <a:srgbClr val="AFC3CE"/>
+                </a:solidFill>
+                <a:latin typeface="Consolas"/>
+              </a:rPr>
+              <a:t>3/8</a:t>
+            </a:r>
+          </a:p>
+        </p:txBody>
+      </p:sp>
+      <p:sp>
+        <p:nvSpPr>
+          <p:cNvPr id="47" name="TextBox 46"/>
+          <p:cNvSpPr txBox="1"/>
+          <p:nvPr/>
+        </p:nvSpPr>
+        <p:spPr>
+          <a:xfrm>
+            <a:off x="10104120" y="4343400"/>
             <a:ext cx="1463040" cy="310896"/>
           </a:xfrm>
           <a:prstGeom prst="rect">
@@ -5886,18 +6120,18 @@
             <a:r>
               <a:rPr sz="1300" b="0" i="0">
                 <a:solidFill>
-                  <a:srgbClr val="AFC3CE"/>
-                </a:solidFill>
-                <a:latin typeface="Consolas"/>
-              </a:rPr>
-              <a:t>3/8</a:t>
-            </a:r>
-          </a:p>
-        </p:txBody>
-      </p:sp>
-      <p:sp>
-        <p:nvSpPr>
-          <p:cNvPr id="42" name="TextBox 41"/>
+                  <a:srgbClr val="5B6E7A"/>
+                </a:solidFill>
+                <a:latin typeface="Consolas"/>
+              </a:rPr>
+              <a:t>6/229</a:t>
+            </a:r>
+          </a:p>
+        </p:txBody>
+      </p:sp>
+      <p:sp>
+        <p:nvSpPr>
+          <p:cNvPr id="48" name="TextBox 47"/>
           <p:cNvSpPr txBox="1"/>
           <p:nvPr/>
         </p:nvSpPr>
@@ -5936,7 +6170,7 @@
       </p:sp>
       <p:sp>
         <p:nvSpPr>
-          <p:cNvPr id="43" name="TextBox 42"/>
+          <p:cNvPr id="49" name="TextBox 48"/>
           <p:cNvSpPr txBox="1"/>
           <p:nvPr/>
         </p:nvSpPr>
@@ -5975,7 +6209,7 @@
       </p:sp>
       <p:sp>
         <p:nvSpPr>
-          <p:cNvPr id="44" name="TextBox 43"/>
+          <p:cNvPr id="50" name="TextBox 49"/>
           <p:cNvSpPr txBox="1"/>
           <p:nvPr/>
         </p:nvSpPr>
@@ -6014,7 +6248,7 @@
       </p:sp>
       <p:sp>
         <p:nvSpPr>
-          <p:cNvPr id="45" name="TextBox 44"/>
+          <p:cNvPr id="51" name="TextBox 50"/>
           <p:cNvSpPr txBox="1"/>
           <p:nvPr/>
         </p:nvSpPr>
@@ -6053,7 +6287,7 @@
       </p:sp>
       <p:sp>
         <p:nvSpPr>
-          <p:cNvPr id="46" name="TextBox 45"/>
+          <p:cNvPr id="52" name="TextBox 51"/>
           <p:cNvSpPr txBox="1"/>
           <p:nvPr/>
         </p:nvSpPr>
@@ -6092,13 +6326,52 @@
       </p:sp>
       <p:sp>
         <p:nvSpPr>
-          <p:cNvPr id="47" name="TextBox 46"/>
-          <p:cNvSpPr txBox="1"/>
-          <p:nvPr/>
-        </p:nvSpPr>
-        <p:spPr>
-          <a:xfrm>
-            <a:off x="8915400" y="4709160"/>
+          <p:cNvPr id="53" name="TextBox 52"/>
+          <p:cNvSpPr txBox="1"/>
+          <p:nvPr/>
+        </p:nvSpPr>
+        <p:spPr>
+          <a:xfrm>
+            <a:off x="8732520" y="4709160"/>
+            <a:ext cx="1188720" cy="310896"/>
+          </a:xfrm>
+          <a:prstGeom prst="rect">
+            <a:avLst/>
+          </a:prstGeom>
+          <a:noFill/>
+        </p:spPr>
+        <p:txBody>
+          <a:bodyPr wrap="square" lIns="0" rIns="0" tIns="0" bIns="0" anchor="t">
+            <a:spAutoFit/>
+          </a:bodyPr>
+          <a:lstStyle/>
+          <a:p>
+            <a:pPr algn="l">
+              <a:spcAft>
+                <a:spcPts val="0"/>
+              </a:spcAft>
+            </a:pPr>
+            <a:r>
+              <a:rPr sz="1300" b="0" i="0">
+                <a:solidFill>
+                  <a:srgbClr val="AFC3CE"/>
+                </a:solidFill>
+                <a:latin typeface="Consolas"/>
+              </a:rPr>
+              <a:t>60/86</a:t>
+            </a:r>
+          </a:p>
+        </p:txBody>
+      </p:sp>
+      <p:sp>
+        <p:nvSpPr>
+          <p:cNvPr id="54" name="TextBox 53"/>
+          <p:cNvSpPr txBox="1"/>
+          <p:nvPr/>
+        </p:nvSpPr>
+        <p:spPr>
+          <a:xfrm>
+            <a:off x="10104120" y="4709160"/>
             <a:ext cx="1463040" cy="310896"/>
           </a:xfrm>
           <a:prstGeom prst="rect">
@@ -6120,18 +6393,18 @@
             <a:r>
               <a:rPr sz="1300" b="0" i="0">
                 <a:solidFill>
-                  <a:srgbClr val="AFC3CE"/>
-                </a:solidFill>
-                <a:latin typeface="Consolas"/>
-              </a:rPr>
-              <a:t>60/86</a:t>
-            </a:r>
-          </a:p>
-        </p:txBody>
-      </p:sp>
-      <p:sp>
-        <p:nvSpPr>
-          <p:cNvPr id="48" name="TextBox 47"/>
+                  <a:srgbClr val="5B6E7A"/>
+                </a:solidFill>
+                <a:latin typeface="Consolas"/>
+              </a:rPr>
+              <a:t>71/242</a:t>
+            </a:r>
+          </a:p>
+        </p:txBody>
+      </p:sp>
+      <p:sp>
+        <p:nvSpPr>
+          <p:cNvPr id="55" name="TextBox 54"/>
           <p:cNvSpPr txBox="1"/>
           <p:nvPr/>
         </p:nvSpPr>
@@ -6163,7 +6436,7 @@
                 </a:solidFill>
                 <a:latin typeface="Calibri"/>
               </a:rPr>
-              <a:t>A zero from a cut-off answer is recoverable; a zero from a wrong answer is not. For the stronger models most of that zero was budget.</a:t>
+              <a:t>A zero from a cut-off answer is recoverable; a zero from a wrong answer is not. For the stronger models most of that zero was budget. The two right-hand columns differ because the ladder is incomplete: not every truncated prompt was re-run, so the overall count is the honest one.</a:t>
             </a:r>
           </a:p>
           <a:p>

--- a/docs/slides/pdbthink-results-2026-09-08.pptx
+++ b/docs/slides/pdbthink-results-2026-09-08.pptx
@@ -4837,7 +4837,7 @@
                 </a:solidFill>
                 <a:latin typeface="Consolas"/>
               </a:rPr>
-              <a:t>47</a:t>
+              <a:t>58</a:t>
             </a:r>
           </a:p>
         </p:txBody>
@@ -4954,7 +4954,7 @@
                 </a:solidFill>
                 <a:latin typeface="Consolas"/>
               </a:rPr>
-              <a:t>0.615</a:t>
+              <a:t>0.619</a:t>
             </a:r>
           </a:p>
         </p:txBody>
@@ -4993,7 +4993,7 @@
                 </a:solidFill>
                 <a:latin typeface="Consolas"/>
               </a:rPr>
-              <a:t>11/47</a:t>
+              <a:t>13/58</a:t>
             </a:r>
           </a:p>
         </p:txBody>
@@ -5032,7 +5032,7 @@
                 </a:solidFill>
                 <a:latin typeface="Consolas"/>
               </a:rPr>
-              <a:t>24/247</a:t>
+              <a:t>15/247</a:t>
             </a:r>
           </a:p>
         </p:txBody>
@@ -5110,7 +5110,7 @@
                 </a:solidFill>
                 <a:latin typeface="Consolas"/>
               </a:rPr>
-              <a:t>10</a:t>
+              <a:t>11</a:t>
             </a:r>
           </a:p>
         </p:txBody>
@@ -5227,7 +5227,7 @@
                 </a:solidFill>
                 <a:latin typeface="Consolas"/>
               </a:rPr>
-              <a:t>0.664</a:t>
+              <a:t>0.685</a:t>
             </a:r>
           </a:p>
         </p:txBody>
@@ -5266,7 +5266,7 @@
                 </a:solidFill>
                 <a:latin typeface="Consolas"/>
               </a:rPr>
-              <a:t>0/10</a:t>
+              <a:t>0/11</a:t>
             </a:r>
           </a:p>
         </p:txBody>
@@ -5305,7 +5305,7 @@
                 </a:solidFill>
                 <a:latin typeface="Consolas"/>
               </a:rPr>
-              <a:t>14/247</a:t>
+              <a:t>4/247</a:t>
             </a:r>
           </a:p>
         </p:txBody>
@@ -7046,7 +7046,7 @@
                 </a:solidFill>
                 <a:latin typeface="Consolas"/>
               </a:rPr>
-              <a:t>0.804</a:t>
+              <a:t>0.829</a:t>
             </a:r>
           </a:p>
         </p:txBody>

--- a/docs/slides/pdbthink-results-2026-09-08.pptx
+++ b/docs/slides/pdbthink-results-2026-09-08.pptx
@@ -221,11 +221,33 @@
               </a:ln>
             </c:spPr>
           </c:dPt>
+          <c:dPt>
+            <c:idx val="7"/>
+            <c:spPr>
+              <a:solidFill>
+                <a:srgbClr val="0E7C7B"/>
+              </a:solidFill>
+              <a:ln>
+                <a:noFill/>
+              </a:ln>
+            </c:spPr>
+          </c:dPt>
+          <c:dPt>
+            <c:idx val="8"/>
+            <c:spPr>
+              <a:solidFill>
+                <a:srgbClr val="0E7C7B"/>
+              </a:solidFill>
+              <a:ln>
+                <a:noFill/>
+              </a:ln>
+            </c:spPr>
+          </c:dPt>
           <c:cat>
             <c:strRef>
-              <c:f>Sheet1!$A$2:$A$8</c:f>
+              <c:f>Sheet1!$A$2:$A$10</c:f>
               <c:strCache>
-                <c:ptCount val="7"/>
+                <c:ptCount val="9"/>
                 <c:pt idx="0">
                   <c:v>gpt-oss-20b</c:v>
                 </c:pt>
@@ -247,15 +269,21 @@
                 <c:pt idx="6">
                   <c:v>Kimi K3</c:v>
                 </c:pt>
+                <c:pt idx="7">
+                  <c:v>Claude Opus 5</c:v>
+                </c:pt>
+                <c:pt idx="8">
+                  <c:v>GPT-6 Astra</c:v>
+                </c:pt>
               </c:strCache>
             </c:strRef>
           </c:cat>
           <c:val>
             <c:numRef>
-              <c:f>Sheet1!$B$2:$B$8</c:f>
+              <c:f>Sheet1!$B$2:$B$10</c:f>
               <c:numCache>
                 <c:formatCode>General</c:formatCode>
-                <c:ptCount val="7"/>
+                <c:ptCount val="9"/>
                 <c:pt idx="0">
                   <c:v>0.18024685683990194</c:v>
                 </c:pt>
@@ -276,6 +304,12 @@
                 </c:pt>
                 <c:pt idx="6">
                   <c:v>0.6844022292452744</c:v>
+                </c:pt>
+                <c:pt idx="7">
+                  <c:v>0.81400686776101</c:v>
+                </c:pt>
+                <c:pt idx="8">
+                  <c:v>0.856880652208919</c:v>
                 </c:pt>
               </c:numCache>
             </c:numRef>
@@ -483,11 +517,33 @@
               </a:ln>
             </c:spPr>
           </c:dPt>
+          <c:dPt>
+            <c:idx val="7"/>
+            <c:spPr>
+              <a:solidFill>
+                <a:srgbClr val="4FD1C5"/>
+              </a:solidFill>
+              <a:ln>
+                <a:noFill/>
+              </a:ln>
+            </c:spPr>
+          </c:dPt>
+          <c:dPt>
+            <c:idx val="8"/>
+            <c:spPr>
+              <a:solidFill>
+                <a:srgbClr val="4FD1C5"/>
+              </a:solidFill>
+              <a:ln>
+                <a:noFill/>
+              </a:ln>
+            </c:spPr>
+          </c:dPt>
           <c:cat>
             <c:strRef>
-              <c:f>Sheet1!$A$2:$A$8</c:f>
+              <c:f>Sheet1!$A$2:$A$10</c:f>
               <c:strCache>
-                <c:ptCount val="7"/>
+                <c:ptCount val="9"/>
                 <c:pt idx="0">
                   <c:v>gpt-oss-20b</c:v>
                 </c:pt>
@@ -509,15 +565,21 @@
                 <c:pt idx="6">
                   <c:v>Kimi K3</c:v>
                 </c:pt>
+                <c:pt idx="7">
+                  <c:v>Claude Opus 5</c:v>
+                </c:pt>
+                <c:pt idx="8">
+                  <c:v>GPT-6 Astra</c:v>
+                </c:pt>
               </c:strCache>
             </c:strRef>
           </c:cat>
           <c:val>
             <c:numRef>
-              <c:f>Sheet1!$B$2:$B$8</c:f>
+              <c:f>Sheet1!$B$2:$B$10</c:f>
               <c:numCache>
                 <c:formatCode>General</c:formatCode>
-                <c:ptCount val="7"/>
+                <c:ptCount val="9"/>
                 <c:pt idx="0">
                   <c:v>0.25574572384513905</c:v>
                 </c:pt>
@@ -538,6 +600,12 @@
                 </c:pt>
                 <c:pt idx="6">
                   <c:v>0.8296341329236065</c:v>
+                </c:pt>
+                <c:pt idx="7">
+                  <c:v>0.8615800258242702</c:v>
+                </c:pt>
+                <c:pt idx="8">
+                  <c:v>0.856880652208919</c:v>
                 </c:pt>
               </c:numCache>
             </c:numRef>
@@ -4010,7 +4078,7 @@
                 </a:solidFill>
                 <a:latin typeface="Calibri"/>
               </a:rPr>
-              <a:t>Kimi K3 scores 0.684 across the 20 families.</a:t>
+              <a:t>GPT-6 Astra scores 0.857 across the 20 families.</a:t>
             </a:r>
           </a:p>
           <a:p>
@@ -4042,7 +4110,7 @@
                 </a:solidFill>
                 <a:latin typeface="Calibri"/>
               </a:rPr>
-              <a:t>Restricted to responses that finished: 0.830.</a:t>
+              <a:t>Restricted to responses that finished: 0.857.</a:t>
             </a:r>
           </a:p>
         </p:txBody>
@@ -6929,7 +6997,7 @@
                 </a:solidFill>
                 <a:latin typeface="Calibri"/>
               </a:rPr>
-              <a:t>Kimi K3</a:t>
+              <a:t>GPT-6 Astra</a:t>
             </a:r>
           </a:p>
         </p:txBody>
@@ -7007,7 +7075,7 @@
                 </a:solidFill>
                 <a:latin typeface="Consolas"/>
               </a:rPr>
-              <a:t>0.684</a:t>
+              <a:t>0.857</a:t>
             </a:r>
           </a:p>
         </p:txBody>
@@ -7040,13 +7108,13 @@
               </a:spcAft>
             </a:pPr>
             <a:r>
-              <a:rPr sz="1250" b="1" i="0">
-                <a:solidFill>
-                  <a:srgbClr val="4FD1C5"/>
-                </a:solidFill>
-                <a:latin typeface="Consolas"/>
-              </a:rPr>
-              <a:t>0.829</a:t>
+              <a:rPr sz="1250" b="0" i="0">
+                <a:solidFill>
+                  <a:srgbClr val="5B6E7A"/>
+                </a:solidFill>
+                <a:latin typeface="Consolas"/>
+              </a:rPr>
+              <a:t>—</a:t>
             </a:r>
           </a:p>
         </p:txBody>
@@ -7085,7 +7153,7 @@
                 </a:solidFill>
                 <a:latin typeface="Consolas"/>
               </a:rPr>
-              <a:t>0.830</a:t>
+              <a:t>0.857</a:t>
             </a:r>
           </a:p>
         </p:txBody>
@@ -7120,11 +7188,11 @@
             <a:r>
               <a:rPr sz="1250" b="0" i="0">
                 <a:solidFill>
-                  <a:srgbClr val="E2725B"/>
-                </a:solidFill>
-                <a:latin typeface="Consolas"/>
-              </a:rPr>
-              <a:t>60/247</a:t>
+                  <a:srgbClr val="5B6E7A"/>
+                </a:solidFill>
+                <a:latin typeface="Consolas"/>
+              </a:rPr>
+              <a:t>0/247</a:t>
             </a:r>
           </a:p>
         </p:txBody>
@@ -7211,7 +7279,7 @@
                 </a:solidFill>
                 <a:latin typeface="Calibri"/>
               </a:rPr>
-              <a:t>DeepSeek V4 Flash</a:t>
+              <a:t>Claude Opus 5</a:t>
             </a:r>
           </a:p>
         </p:txBody>
@@ -7250,7 +7318,7 @@
                 </a:solidFill>
                 <a:latin typeface="Consolas"/>
               </a:rPr>
-              <a:t>222</a:t>
+              <a:t>247</a:t>
             </a:r>
           </a:p>
         </p:txBody>
@@ -7289,7 +7357,7 @@
                 </a:solidFill>
                 <a:latin typeface="Consolas"/>
               </a:rPr>
-              <a:t>0.615</a:t>
+              <a:t>0.814</a:t>
             </a:r>
           </a:p>
         </p:txBody>
@@ -7367,7 +7435,7 @@
                 </a:solidFill>
                 <a:latin typeface="Consolas"/>
               </a:rPr>
-              <a:t>0.756</a:t>
+              <a:t>0.862</a:t>
             </a:r>
           </a:p>
         </p:txBody>
@@ -7406,7 +7474,7 @@
                 </a:solidFill>
                 <a:latin typeface="Consolas"/>
               </a:rPr>
-              <a:t>45/222</a:t>
+              <a:t>13/247</a:t>
             </a:r>
           </a:p>
         </p:txBody>
@@ -7493,7 +7561,7 @@
                 </a:solidFill>
                 <a:latin typeface="Calibri"/>
               </a:rPr>
-              <a:t>Gemma 4 31B</a:t>
+              <a:t>Kimi K3</a:t>
             </a:r>
           </a:p>
         </p:txBody>
@@ -7532,7 +7600,7 @@
                 </a:solidFill>
                 <a:latin typeface="Consolas"/>
               </a:rPr>
-              <a:t>155</a:t>
+              <a:t>247</a:t>
             </a:r>
           </a:p>
         </p:txBody>
@@ -7571,7 +7639,7 @@
                 </a:solidFill>
                 <a:latin typeface="Consolas"/>
               </a:rPr>
-              <a:t>0.578</a:t>
+              <a:t>0.684</a:t>
             </a:r>
           </a:p>
         </p:txBody>
@@ -7604,13 +7672,13 @@
               </a:spcAft>
             </a:pPr>
             <a:r>
-              <a:rPr sz="1250" b="0" i="0">
-                <a:solidFill>
-                  <a:srgbClr val="5B6E7A"/>
-                </a:solidFill>
-                <a:latin typeface="Consolas"/>
-              </a:rPr>
-              <a:t>—</a:t>
+              <a:rPr sz="1250" b="1" i="0">
+                <a:solidFill>
+                  <a:srgbClr val="4FD1C5"/>
+                </a:solidFill>
+                <a:latin typeface="Consolas"/>
+              </a:rPr>
+              <a:t>0.829</a:t>
             </a:r>
           </a:p>
         </p:txBody>
@@ -7649,7 +7717,7 @@
                 </a:solidFill>
                 <a:latin typeface="Consolas"/>
               </a:rPr>
-              <a:t>0.730</a:t>
+              <a:t>0.830</a:t>
             </a:r>
           </a:p>
         </p:txBody>
@@ -7688,7 +7756,7 @@
                 </a:solidFill>
                 <a:latin typeface="Consolas"/>
               </a:rPr>
-              <a:t>19/155</a:t>
+              <a:t>60/247</a:t>
             </a:r>
           </a:p>
         </p:txBody>
@@ -7775,7 +7843,7 @@
                 </a:solidFill>
                 <a:latin typeface="Calibri"/>
               </a:rPr>
-              <a:t>MiniMax M3</a:t>
+              <a:t>DeepSeek V4 Flash</a:t>
             </a:r>
           </a:p>
         </p:txBody>
@@ -7814,7 +7882,7 @@
                 </a:solidFill>
                 <a:latin typeface="Consolas"/>
               </a:rPr>
-              <a:t>247</a:t>
+              <a:t>222</a:t>
             </a:r>
           </a:p>
         </p:txBody>
@@ -7853,7 +7921,7 @@
                 </a:solidFill>
                 <a:latin typeface="Consolas"/>
               </a:rPr>
-              <a:t>0.453</a:t>
+              <a:t>0.615</a:t>
             </a:r>
           </a:p>
         </p:txBody>
@@ -7886,13 +7954,13 @@
               </a:spcAft>
             </a:pPr>
             <a:r>
-              <a:rPr sz="1250" b="1" i="0">
-                <a:solidFill>
-                  <a:srgbClr val="4FD1C5"/>
-                </a:solidFill>
-                <a:latin typeface="Consolas"/>
-              </a:rPr>
-              <a:t>0.528</a:t>
+              <a:rPr sz="1250" b="0" i="0">
+                <a:solidFill>
+                  <a:srgbClr val="5B6E7A"/>
+                </a:solidFill>
+                <a:latin typeface="Consolas"/>
+              </a:rPr>
+              <a:t>—</a:t>
             </a:r>
           </a:p>
         </p:txBody>
@@ -7931,7 +7999,7 @@
                 </a:solidFill>
                 <a:latin typeface="Consolas"/>
               </a:rPr>
-              <a:t>0.757</a:t>
+              <a:t>0.756</a:t>
             </a:r>
           </a:p>
         </p:txBody>
@@ -7970,7 +8038,7 @@
                 </a:solidFill>
                 <a:latin typeface="Consolas"/>
               </a:rPr>
-              <a:t>102/247</a:t>
+              <a:t>45/222</a:t>
             </a:r>
           </a:p>
         </p:txBody>
@@ -8057,7 +8125,7 @@
                 </a:solidFill>
                 <a:latin typeface="Calibri"/>
               </a:rPr>
-              <a:t>Qwen3.5 9B</a:t>
+              <a:t>Gemma 4 31B</a:t>
             </a:r>
           </a:p>
         </p:txBody>
@@ -8096,7 +8164,7 @@
                 </a:solidFill>
                 <a:latin typeface="Consolas"/>
               </a:rPr>
-              <a:t>246</a:t>
+              <a:t>155</a:t>
             </a:r>
           </a:p>
         </p:txBody>
@@ -8135,7 +8203,7 @@
                 </a:solidFill>
                 <a:latin typeface="Consolas"/>
               </a:rPr>
-              <a:t>0.294</a:t>
+              <a:t>0.578</a:t>
             </a:r>
           </a:p>
         </p:txBody>
@@ -8168,13 +8236,13 @@
               </a:spcAft>
             </a:pPr>
             <a:r>
-              <a:rPr sz="1250" b="1" i="0">
-                <a:solidFill>
-                  <a:srgbClr val="4FD1C5"/>
-                </a:solidFill>
-                <a:latin typeface="Consolas"/>
-              </a:rPr>
-              <a:t>0.337</a:t>
+              <a:rPr sz="1250" b="0" i="0">
+                <a:solidFill>
+                  <a:srgbClr val="5B6E7A"/>
+                </a:solidFill>
+                <a:latin typeface="Consolas"/>
+              </a:rPr>
+              <a:t>—</a:t>
             </a:r>
           </a:p>
         </p:txBody>
@@ -8213,7 +8281,7 @@
                 </a:solidFill>
                 <a:latin typeface="Consolas"/>
               </a:rPr>
-              <a:t>0.583</a:t>
+              <a:t>0.730</a:t>
             </a:r>
           </a:p>
         </p:txBody>
@@ -8252,7 +8320,7 @@
                 </a:solidFill>
                 <a:latin typeface="Consolas"/>
               </a:rPr>
-              <a:t>159/246</a:t>
+              <a:t>19/155</a:t>
             </a:r>
           </a:p>
         </p:txBody>
@@ -8339,7 +8407,7 @@
                 </a:solidFill>
                 <a:latin typeface="Calibri"/>
               </a:rPr>
-              <a:t>gpt-oss-120b</a:t>
+              <a:t>MiniMax M3</a:t>
             </a:r>
           </a:p>
         </p:txBody>
@@ -8378,7 +8446,7 @@
                 </a:solidFill>
                 <a:latin typeface="Consolas"/>
               </a:rPr>
-              <a:t>229</a:t>
+              <a:t>247</a:t>
             </a:r>
           </a:p>
         </p:txBody>
@@ -8417,7 +8485,7 @@
                 </a:solidFill>
                 <a:latin typeface="Consolas"/>
               </a:rPr>
-              <a:t>0.257</a:t>
+              <a:t>0.453</a:t>
             </a:r>
           </a:p>
         </p:txBody>
@@ -8456,7 +8524,7 @@
                 </a:solidFill>
                 <a:latin typeface="Consolas"/>
               </a:rPr>
-              <a:t>0.259</a:t>
+              <a:t>0.528</a:t>
             </a:r>
           </a:p>
         </p:txBody>
@@ -8495,7 +8563,7 @@
                 </a:solidFill>
                 <a:latin typeface="Consolas"/>
               </a:rPr>
-              <a:t>0.270</a:t>
+              <a:t>0.757</a:t>
             </a:r>
           </a:p>
         </p:txBody>
@@ -8534,7 +8602,7 @@
                 </a:solidFill>
                 <a:latin typeface="Consolas"/>
               </a:rPr>
-              <a:t>11/229</a:t>
+              <a:t>102/247</a:t>
             </a:r>
           </a:p>
         </p:txBody>
@@ -8621,7 +8689,7 @@
                 </a:solidFill>
                 <a:latin typeface="Calibri"/>
               </a:rPr>
-              <a:t>gpt-oss-20b</a:t>
+              <a:t>Qwen3.5 9B</a:t>
             </a:r>
           </a:p>
         </p:txBody>
@@ -8660,7 +8728,7 @@
                 </a:solidFill>
                 <a:latin typeface="Consolas"/>
               </a:rPr>
-              <a:t>242</a:t>
+              <a:t>246</a:t>
             </a:r>
           </a:p>
         </p:txBody>
@@ -8699,7 +8767,7 @@
                 </a:solidFill>
                 <a:latin typeface="Consolas"/>
               </a:rPr>
-              <a:t>0.180</a:t>
+              <a:t>0.294</a:t>
             </a:r>
           </a:p>
         </p:txBody>
@@ -8738,7 +8806,7 @@
                 </a:solidFill>
                 <a:latin typeface="Consolas"/>
               </a:rPr>
-              <a:t>0.197</a:t>
+              <a:t>0.337</a:t>
             </a:r>
           </a:p>
         </p:txBody>
@@ -8777,7 +8845,7 @@
                 </a:solidFill>
                 <a:latin typeface="Consolas"/>
               </a:rPr>
-              <a:t>0.256</a:t>
+              <a:t>0.583</a:t>
             </a:r>
           </a:p>
         </p:txBody>
@@ -8816,7 +8884,7 @@
                 </a:solidFill>
                 <a:latin typeface="Consolas"/>
               </a:rPr>
-              <a:t>97/242</a:t>
+              <a:t>159/246</a:t>
             </a:r>
           </a:p>
         </p:txBody>
@@ -8838,7 +8906,7 @@
             </a:avLst>
           </a:prstGeom>
           <a:solidFill>
-            <a:srgbClr val="EEF2F4"/>
+            <a:srgbClr val="FFFFFF"/>
           </a:solidFill>
           <a:ln w="9525">
             <a:solidFill>
@@ -8897,13 +8965,13 @@
               </a:spcAft>
             </a:pPr>
             <a:r>
-              <a:rPr sz="1250" b="0" i="0">
-                <a:solidFill>
-                  <a:srgbClr val="5B6E7A"/>
+              <a:rPr sz="1250" b="1" i="0">
+                <a:solidFill>
+                  <a:srgbClr val="15242E"/>
                 </a:solidFill>
                 <a:latin typeface="Calibri"/>
               </a:rPr>
-              <a:t>Marin 32B (base)   (8/20 families — not comparable)</a:t>
+              <a:t>gpt-oss-120b</a:t>
             </a:r>
           </a:p>
         </p:txBody>
@@ -8942,7 +9010,7 @@
                 </a:solidFill>
                 <a:latin typeface="Consolas"/>
               </a:rPr>
-              <a:t>36</a:t>
+              <a:t>229</a:t>
             </a:r>
           </a:p>
         </p:txBody>
@@ -8975,13 +9043,13 @@
               </a:spcAft>
             </a:pPr>
             <a:r>
-              <a:rPr sz="1250" b="0" i="0">
-                <a:solidFill>
-                  <a:srgbClr val="5B6E7A"/>
-                </a:solidFill>
-                <a:latin typeface="Consolas"/>
-              </a:rPr>
-              <a:t>0.053</a:t>
+              <a:rPr sz="1250" b="1" i="0">
+                <a:solidFill>
+                  <a:srgbClr val="15242E"/>
+                </a:solidFill>
+                <a:latin typeface="Consolas"/>
+              </a:rPr>
+              <a:t>0.257</a:t>
             </a:r>
           </a:p>
         </p:txBody>
@@ -9014,13 +9082,13 @@
               </a:spcAft>
             </a:pPr>
             <a:r>
-              <a:rPr sz="1250" b="0" i="0">
-                <a:solidFill>
-                  <a:srgbClr val="5B6E7A"/>
-                </a:solidFill>
-                <a:latin typeface="Consolas"/>
-              </a:rPr>
-              <a:t>—</a:t>
+              <a:rPr sz="1250" b="1" i="0">
+                <a:solidFill>
+                  <a:srgbClr val="4FD1C5"/>
+                </a:solidFill>
+                <a:latin typeface="Consolas"/>
+              </a:rPr>
+              <a:t>0.259</a:t>
             </a:r>
           </a:p>
         </p:txBody>
@@ -9055,11 +9123,11 @@
             <a:r>
               <a:rPr sz="1250" b="0" i="0">
                 <a:solidFill>
-                  <a:srgbClr val="5B6E7A"/>
-                </a:solidFill>
-                <a:latin typeface="Consolas"/>
-              </a:rPr>
-              <a:t>0.142</a:t>
+                  <a:srgbClr val="0E7C7B"/>
+                </a:solidFill>
+                <a:latin typeface="Consolas"/>
+              </a:rPr>
+              <a:t>0.270</a:t>
             </a:r>
           </a:p>
         </p:txBody>
@@ -9098,6 +9166,570 @@
                 </a:solidFill>
                 <a:latin typeface="Consolas"/>
               </a:rPr>
+              <a:t>11/229</a:t>
+            </a:r>
+          </a:p>
+        </p:txBody>
+      </p:sp>
+      <p:sp>
+        <p:nvSpPr>
+          <p:cNvPr id="67" name="Rounded Rectangle 66"/>
+          <p:cNvSpPr/>
+          <p:nvPr/>
+        </p:nvSpPr>
+        <p:spPr>
+          <a:xfrm>
+            <a:off x="822960" y="6135624"/>
+            <a:ext cx="10607040" cy="457200"/>
+          </a:xfrm>
+          <a:prstGeom prst="roundRect">
+            <a:avLst>
+              <a:gd name="adj" fmla="val 4000"/>
+            </a:avLst>
+          </a:prstGeom>
+          <a:solidFill>
+            <a:srgbClr val="FFFFFF"/>
+          </a:solidFill>
+          <a:ln w="9525">
+            <a:solidFill>
+              <a:srgbClr val="E1E8EC"/>
+            </a:solidFill>
+          </a:ln>
+          <a:effectLst/>
+        </p:spPr>
+        <p:style>
+          <a:lnRef idx="1">
+            <a:schemeClr val="accent1"/>
+          </a:lnRef>
+          <a:fillRef idx="3">
+            <a:schemeClr val="accent1"/>
+          </a:fillRef>
+          <a:effectRef idx="2">
+            <a:schemeClr val="accent1"/>
+          </a:effectRef>
+          <a:fontRef idx="minor">
+            <a:schemeClr val="lt1"/>
+          </a:fontRef>
+        </p:style>
+        <p:txBody>
+          <a:bodyPr rtlCol="0" anchor="ctr"/>
+          <a:lstStyle/>
+          <a:p>
+            <a:pPr algn="ctr"/>
+          </a:p>
+        </p:txBody>
+      </p:sp>
+      <p:sp>
+        <p:nvSpPr>
+          <p:cNvPr id="68" name="TextBox 67"/>
+          <p:cNvSpPr txBox="1"/>
+          <p:nvPr/>
+        </p:nvSpPr>
+        <p:spPr>
+          <a:xfrm>
+            <a:off x="1051560" y="6227064"/>
+            <a:ext cx="4389120" cy="310896"/>
+          </a:xfrm>
+          <a:prstGeom prst="rect">
+            <a:avLst/>
+          </a:prstGeom>
+          <a:noFill/>
+        </p:spPr>
+        <p:txBody>
+          <a:bodyPr wrap="square" lIns="0" rIns="0" tIns="0" bIns="0" anchor="t">
+            <a:spAutoFit/>
+          </a:bodyPr>
+          <a:lstStyle/>
+          <a:p>
+            <a:pPr algn="l">
+              <a:spcAft>
+                <a:spcPts val="0"/>
+              </a:spcAft>
+            </a:pPr>
+            <a:r>
+              <a:rPr sz="1250" b="1" i="0">
+                <a:solidFill>
+                  <a:srgbClr val="15242E"/>
+                </a:solidFill>
+                <a:latin typeface="Calibri"/>
+              </a:rPr>
+              <a:t>gpt-oss-20b</a:t>
+            </a:r>
+          </a:p>
+        </p:txBody>
+      </p:sp>
+      <p:sp>
+        <p:nvSpPr>
+          <p:cNvPr id="69" name="TextBox 68"/>
+          <p:cNvSpPr txBox="1"/>
+          <p:nvPr/>
+        </p:nvSpPr>
+        <p:spPr>
+          <a:xfrm>
+            <a:off x="5074920" y="6227064"/>
+            <a:ext cx="1280160" cy="310896"/>
+          </a:xfrm>
+          <a:prstGeom prst="rect">
+            <a:avLst/>
+          </a:prstGeom>
+          <a:noFill/>
+        </p:spPr>
+        <p:txBody>
+          <a:bodyPr wrap="square" lIns="0" rIns="0" tIns="0" bIns="0" anchor="t">
+            <a:spAutoFit/>
+          </a:bodyPr>
+          <a:lstStyle/>
+          <a:p>
+            <a:pPr algn="l">
+              <a:spcAft>
+                <a:spcPts val="0"/>
+              </a:spcAft>
+            </a:pPr>
+            <a:r>
+              <a:rPr sz="1250" b="0" i="0">
+                <a:solidFill>
+                  <a:srgbClr val="5B6E7A"/>
+                </a:solidFill>
+                <a:latin typeface="Consolas"/>
+              </a:rPr>
+              <a:t>242</a:t>
+            </a:r>
+          </a:p>
+        </p:txBody>
+      </p:sp>
+      <p:sp>
+        <p:nvSpPr>
+          <p:cNvPr id="70" name="TextBox 69"/>
+          <p:cNvSpPr txBox="1"/>
+          <p:nvPr/>
+        </p:nvSpPr>
+        <p:spPr>
+          <a:xfrm>
+            <a:off x="6355080" y="6227064"/>
+            <a:ext cx="1280160" cy="310896"/>
+          </a:xfrm>
+          <a:prstGeom prst="rect">
+            <a:avLst/>
+          </a:prstGeom>
+          <a:noFill/>
+        </p:spPr>
+        <p:txBody>
+          <a:bodyPr wrap="square" lIns="0" rIns="0" tIns="0" bIns="0" anchor="t">
+            <a:spAutoFit/>
+          </a:bodyPr>
+          <a:lstStyle/>
+          <a:p>
+            <a:pPr algn="l">
+              <a:spcAft>
+                <a:spcPts val="0"/>
+              </a:spcAft>
+            </a:pPr>
+            <a:r>
+              <a:rPr sz="1250" b="1" i="0">
+                <a:solidFill>
+                  <a:srgbClr val="15242E"/>
+                </a:solidFill>
+                <a:latin typeface="Consolas"/>
+              </a:rPr>
+              <a:t>0.180</a:t>
+            </a:r>
+          </a:p>
+        </p:txBody>
+      </p:sp>
+      <p:sp>
+        <p:nvSpPr>
+          <p:cNvPr id="71" name="TextBox 70"/>
+          <p:cNvSpPr txBox="1"/>
+          <p:nvPr/>
+        </p:nvSpPr>
+        <p:spPr>
+          <a:xfrm>
+            <a:off x="7818120" y="6227064"/>
+            <a:ext cx="1280160" cy="310896"/>
+          </a:xfrm>
+          <a:prstGeom prst="rect">
+            <a:avLst/>
+          </a:prstGeom>
+          <a:noFill/>
+        </p:spPr>
+        <p:txBody>
+          <a:bodyPr wrap="square" lIns="0" rIns="0" tIns="0" bIns="0" anchor="t">
+            <a:spAutoFit/>
+          </a:bodyPr>
+          <a:lstStyle/>
+          <a:p>
+            <a:pPr algn="l">
+              <a:spcAft>
+                <a:spcPts val="0"/>
+              </a:spcAft>
+            </a:pPr>
+            <a:r>
+              <a:rPr sz="1250" b="1" i="0">
+                <a:solidFill>
+                  <a:srgbClr val="4FD1C5"/>
+                </a:solidFill>
+                <a:latin typeface="Consolas"/>
+              </a:rPr>
+              <a:t>0.197</a:t>
+            </a:r>
+          </a:p>
+        </p:txBody>
+      </p:sp>
+      <p:sp>
+        <p:nvSpPr>
+          <p:cNvPr id="72" name="TextBox 71"/>
+          <p:cNvSpPr txBox="1"/>
+          <p:nvPr/>
+        </p:nvSpPr>
+        <p:spPr>
+          <a:xfrm>
+            <a:off x="9281160" y="6227064"/>
+            <a:ext cx="1280160" cy="310896"/>
+          </a:xfrm>
+          <a:prstGeom prst="rect">
+            <a:avLst/>
+          </a:prstGeom>
+          <a:noFill/>
+        </p:spPr>
+        <p:txBody>
+          <a:bodyPr wrap="square" lIns="0" rIns="0" tIns="0" bIns="0" anchor="t">
+            <a:spAutoFit/>
+          </a:bodyPr>
+          <a:lstStyle/>
+          <a:p>
+            <a:pPr algn="l">
+              <a:spcAft>
+                <a:spcPts val="0"/>
+              </a:spcAft>
+            </a:pPr>
+            <a:r>
+              <a:rPr sz="1250" b="0" i="0">
+                <a:solidFill>
+                  <a:srgbClr val="0E7C7B"/>
+                </a:solidFill>
+                <a:latin typeface="Consolas"/>
+              </a:rPr>
+              <a:t>0.256</a:t>
+            </a:r>
+          </a:p>
+        </p:txBody>
+      </p:sp>
+      <p:sp>
+        <p:nvSpPr>
+          <p:cNvPr id="73" name="TextBox 72"/>
+          <p:cNvSpPr txBox="1"/>
+          <p:nvPr/>
+        </p:nvSpPr>
+        <p:spPr>
+          <a:xfrm>
+            <a:off x="11018520" y="6227064"/>
+            <a:ext cx="1371600" cy="310896"/>
+          </a:xfrm>
+          <a:prstGeom prst="rect">
+            <a:avLst/>
+          </a:prstGeom>
+          <a:noFill/>
+        </p:spPr>
+        <p:txBody>
+          <a:bodyPr wrap="square" lIns="0" rIns="0" tIns="0" bIns="0" anchor="t">
+            <a:spAutoFit/>
+          </a:bodyPr>
+          <a:lstStyle/>
+          <a:p>
+            <a:pPr algn="l">
+              <a:spcAft>
+                <a:spcPts val="0"/>
+              </a:spcAft>
+            </a:pPr>
+            <a:r>
+              <a:rPr sz="1250" b="0" i="0">
+                <a:solidFill>
+                  <a:srgbClr val="E2725B"/>
+                </a:solidFill>
+                <a:latin typeface="Consolas"/>
+              </a:rPr>
+              <a:t>97/242</a:t>
+            </a:r>
+          </a:p>
+        </p:txBody>
+      </p:sp>
+      <p:sp>
+        <p:nvSpPr>
+          <p:cNvPr id="74" name="Rounded Rectangle 73"/>
+          <p:cNvSpPr/>
+          <p:nvPr/>
+        </p:nvSpPr>
+        <p:spPr>
+          <a:xfrm>
+            <a:off x="822960" y="6647688"/>
+            <a:ext cx="10607040" cy="457200"/>
+          </a:xfrm>
+          <a:prstGeom prst="roundRect">
+            <a:avLst>
+              <a:gd name="adj" fmla="val 4000"/>
+            </a:avLst>
+          </a:prstGeom>
+          <a:solidFill>
+            <a:srgbClr val="EEF2F4"/>
+          </a:solidFill>
+          <a:ln w="9525">
+            <a:solidFill>
+              <a:srgbClr val="E1E8EC"/>
+            </a:solidFill>
+          </a:ln>
+          <a:effectLst/>
+        </p:spPr>
+        <p:style>
+          <a:lnRef idx="1">
+            <a:schemeClr val="accent1"/>
+          </a:lnRef>
+          <a:fillRef idx="3">
+            <a:schemeClr val="accent1"/>
+          </a:fillRef>
+          <a:effectRef idx="2">
+            <a:schemeClr val="accent1"/>
+          </a:effectRef>
+          <a:fontRef idx="minor">
+            <a:schemeClr val="lt1"/>
+          </a:fontRef>
+        </p:style>
+        <p:txBody>
+          <a:bodyPr rtlCol="0" anchor="ctr"/>
+          <a:lstStyle/>
+          <a:p>
+            <a:pPr algn="ctr"/>
+          </a:p>
+        </p:txBody>
+      </p:sp>
+      <p:sp>
+        <p:nvSpPr>
+          <p:cNvPr id="75" name="TextBox 74"/>
+          <p:cNvSpPr txBox="1"/>
+          <p:nvPr/>
+        </p:nvSpPr>
+        <p:spPr>
+          <a:xfrm>
+            <a:off x="1051560" y="6739128"/>
+            <a:ext cx="4389120" cy="310896"/>
+          </a:xfrm>
+          <a:prstGeom prst="rect">
+            <a:avLst/>
+          </a:prstGeom>
+          <a:noFill/>
+        </p:spPr>
+        <p:txBody>
+          <a:bodyPr wrap="square" lIns="0" rIns="0" tIns="0" bIns="0" anchor="t">
+            <a:spAutoFit/>
+          </a:bodyPr>
+          <a:lstStyle/>
+          <a:p>
+            <a:pPr algn="l">
+              <a:spcAft>
+                <a:spcPts val="0"/>
+              </a:spcAft>
+            </a:pPr>
+            <a:r>
+              <a:rPr sz="1250" b="0" i="0">
+                <a:solidFill>
+                  <a:srgbClr val="5B6E7A"/>
+                </a:solidFill>
+                <a:latin typeface="Calibri"/>
+              </a:rPr>
+              <a:t>Marin 32B (base)   (8/20 families — not comparable)</a:t>
+            </a:r>
+          </a:p>
+        </p:txBody>
+      </p:sp>
+      <p:sp>
+        <p:nvSpPr>
+          <p:cNvPr id="76" name="TextBox 75"/>
+          <p:cNvSpPr txBox="1"/>
+          <p:nvPr/>
+        </p:nvSpPr>
+        <p:spPr>
+          <a:xfrm>
+            <a:off x="5074920" y="6739128"/>
+            <a:ext cx="1280160" cy="310896"/>
+          </a:xfrm>
+          <a:prstGeom prst="rect">
+            <a:avLst/>
+          </a:prstGeom>
+          <a:noFill/>
+        </p:spPr>
+        <p:txBody>
+          <a:bodyPr wrap="square" lIns="0" rIns="0" tIns="0" bIns="0" anchor="t">
+            <a:spAutoFit/>
+          </a:bodyPr>
+          <a:lstStyle/>
+          <a:p>
+            <a:pPr algn="l">
+              <a:spcAft>
+                <a:spcPts val="0"/>
+              </a:spcAft>
+            </a:pPr>
+            <a:r>
+              <a:rPr sz="1250" b="0" i="0">
+                <a:solidFill>
+                  <a:srgbClr val="5B6E7A"/>
+                </a:solidFill>
+                <a:latin typeface="Consolas"/>
+              </a:rPr>
+              <a:t>36</a:t>
+            </a:r>
+          </a:p>
+        </p:txBody>
+      </p:sp>
+      <p:sp>
+        <p:nvSpPr>
+          <p:cNvPr id="77" name="TextBox 76"/>
+          <p:cNvSpPr txBox="1"/>
+          <p:nvPr/>
+        </p:nvSpPr>
+        <p:spPr>
+          <a:xfrm>
+            <a:off x="6355080" y="6739128"/>
+            <a:ext cx="1280160" cy="310896"/>
+          </a:xfrm>
+          <a:prstGeom prst="rect">
+            <a:avLst/>
+          </a:prstGeom>
+          <a:noFill/>
+        </p:spPr>
+        <p:txBody>
+          <a:bodyPr wrap="square" lIns="0" rIns="0" tIns="0" bIns="0" anchor="t">
+            <a:spAutoFit/>
+          </a:bodyPr>
+          <a:lstStyle/>
+          <a:p>
+            <a:pPr algn="l">
+              <a:spcAft>
+                <a:spcPts val="0"/>
+              </a:spcAft>
+            </a:pPr>
+            <a:r>
+              <a:rPr sz="1250" b="0" i="0">
+                <a:solidFill>
+                  <a:srgbClr val="5B6E7A"/>
+                </a:solidFill>
+                <a:latin typeface="Consolas"/>
+              </a:rPr>
+              <a:t>0.053</a:t>
+            </a:r>
+          </a:p>
+        </p:txBody>
+      </p:sp>
+      <p:sp>
+        <p:nvSpPr>
+          <p:cNvPr id="78" name="TextBox 77"/>
+          <p:cNvSpPr txBox="1"/>
+          <p:nvPr/>
+        </p:nvSpPr>
+        <p:spPr>
+          <a:xfrm>
+            <a:off x="7818120" y="6739128"/>
+            <a:ext cx="1280160" cy="310896"/>
+          </a:xfrm>
+          <a:prstGeom prst="rect">
+            <a:avLst/>
+          </a:prstGeom>
+          <a:noFill/>
+        </p:spPr>
+        <p:txBody>
+          <a:bodyPr wrap="square" lIns="0" rIns="0" tIns="0" bIns="0" anchor="t">
+            <a:spAutoFit/>
+          </a:bodyPr>
+          <a:lstStyle/>
+          <a:p>
+            <a:pPr algn="l">
+              <a:spcAft>
+                <a:spcPts val="0"/>
+              </a:spcAft>
+            </a:pPr>
+            <a:r>
+              <a:rPr sz="1250" b="0" i="0">
+                <a:solidFill>
+                  <a:srgbClr val="5B6E7A"/>
+                </a:solidFill>
+                <a:latin typeface="Consolas"/>
+              </a:rPr>
+              <a:t>—</a:t>
+            </a:r>
+          </a:p>
+        </p:txBody>
+      </p:sp>
+      <p:sp>
+        <p:nvSpPr>
+          <p:cNvPr id="79" name="TextBox 78"/>
+          <p:cNvSpPr txBox="1"/>
+          <p:nvPr/>
+        </p:nvSpPr>
+        <p:spPr>
+          <a:xfrm>
+            <a:off x="9281160" y="6739128"/>
+            <a:ext cx="1280160" cy="310896"/>
+          </a:xfrm>
+          <a:prstGeom prst="rect">
+            <a:avLst/>
+          </a:prstGeom>
+          <a:noFill/>
+        </p:spPr>
+        <p:txBody>
+          <a:bodyPr wrap="square" lIns="0" rIns="0" tIns="0" bIns="0" anchor="t">
+            <a:spAutoFit/>
+          </a:bodyPr>
+          <a:lstStyle/>
+          <a:p>
+            <a:pPr algn="l">
+              <a:spcAft>
+                <a:spcPts val="0"/>
+              </a:spcAft>
+            </a:pPr>
+            <a:r>
+              <a:rPr sz="1250" b="0" i="0">
+                <a:solidFill>
+                  <a:srgbClr val="5B6E7A"/>
+                </a:solidFill>
+                <a:latin typeface="Consolas"/>
+              </a:rPr>
+              <a:t>0.142</a:t>
+            </a:r>
+          </a:p>
+        </p:txBody>
+      </p:sp>
+      <p:sp>
+        <p:nvSpPr>
+          <p:cNvPr id="80" name="TextBox 79"/>
+          <p:cNvSpPr txBox="1"/>
+          <p:nvPr/>
+        </p:nvSpPr>
+        <p:spPr>
+          <a:xfrm>
+            <a:off x="11018520" y="6739128"/>
+            <a:ext cx="1371600" cy="310896"/>
+          </a:xfrm>
+          <a:prstGeom prst="rect">
+            <a:avLst/>
+          </a:prstGeom>
+          <a:noFill/>
+        </p:spPr>
+        <p:txBody>
+          <a:bodyPr wrap="square" lIns="0" rIns="0" tIns="0" bIns="0" anchor="t">
+            <a:spAutoFit/>
+          </a:bodyPr>
+          <a:lstStyle/>
+          <a:p>
+            <a:pPr algn="l">
+              <a:spcAft>
+                <a:spcPts val="0"/>
+              </a:spcAft>
+            </a:pPr>
+            <a:r>
+              <a:rPr sz="1250" b="0" i="0">
+                <a:solidFill>
+                  <a:srgbClr val="E2725B"/>
+                </a:solidFill>
+                <a:latin typeface="Consolas"/>
+              </a:rPr>
               <a:t>22/36</a:t>
             </a:r>
           </a:p>
@@ -9105,13 +9737,13 @@
       </p:sp>
       <p:sp>
         <p:nvSpPr>
-          <p:cNvPr id="67" name="TextBox 66"/>
-          <p:cNvSpPr txBox="1"/>
-          <p:nvPr/>
-        </p:nvSpPr>
-        <p:spPr>
-          <a:xfrm>
-            <a:off x="822960" y="6382512"/>
+          <p:cNvPr id="81" name="TextBox 80"/>
+          <p:cNvSpPr txBox="1"/>
+          <p:nvPr/>
+        </p:nvSpPr>
+        <p:spPr>
+          <a:xfrm>
+            <a:off x="822960" y="7406640"/>
             <a:ext cx="10607040" cy="731520"/>
           </a:xfrm>
           <a:prstGeom prst="rect">
@@ -9277,7 +9909,7 @@
                 </a:solidFill>
                 <a:latin typeface="Cambria"/>
               </a:rPr>
-              <a:t>Kimi K3: solved outright, or never finished</a:t>
+              <a:t>GPT-6 Astra: solved outright, or never finished</a:t>
             </a:r>
           </a:p>
         </p:txBody>
@@ -9316,7 +9948,7 @@
                 </a:solidFill>
                 <a:latin typeface="Calibri"/>
               </a:rPr>
-              <a:t>9 of 20 families at 0.95 or above</a:t>
+              <a:t>11 of 20 families at 0.95 or above</a:t>
             </a:r>
           </a:p>
         </p:txBody>
@@ -9355,7 +9987,7 @@
                 </a:solidFill>
                 <a:latin typeface="Consolas"/>
               </a:rPr>
-              <a:t>G01   G02   G03   N01   P03   S01   S02   S07   T01</a:t>
+              <a:t>G01   G02   G03   G04   N01   P03   S01   S02   S06   S07   T01</a:t>
             </a:r>
           </a:p>
         </p:txBody>
@@ -9589,7 +10221,7 @@
                 </a:solidFill>
                 <a:latin typeface="Consolas"/>
               </a:rPr>
-              <a:t>I01</a:t>
+              <a:t>S05</a:t>
             </a:r>
           </a:p>
         </p:txBody>
@@ -9628,7 +10260,7 @@
                 </a:solidFill>
                 <a:latin typeface="Consolas"/>
               </a:rPr>
-              <a:t>0.031</a:t>
+              <a:t>0.533</a:t>
             </a:r>
           </a:p>
         </p:txBody>
@@ -9667,7 +10299,7 @@
                 </a:solidFill>
                 <a:latin typeface="Consolas"/>
               </a:rPr>
-              <a:t>0.400</a:t>
+              <a:t>0.533</a:t>
             </a:r>
           </a:p>
         </p:txBody>
@@ -9706,7 +10338,7 @@
                 </a:solidFill>
                 <a:latin typeface="Consolas"/>
               </a:rPr>
-              <a:t>12/13</a:t>
+              <a:t>0/15</a:t>
             </a:r>
           </a:p>
         </p:txBody>
@@ -9745,7 +10377,7 @@
                 </a:solidFill>
                 <a:latin typeface="Consolas"/>
               </a:rPr>
-              <a:t>G04</a:t>
+              <a:t>P02</a:t>
             </a:r>
           </a:p>
         </p:txBody>
@@ -9784,7 +10416,7 @@
                 </a:solidFill>
                 <a:latin typeface="Consolas"/>
               </a:rPr>
-              <a:t>0.125</a:t>
+              <a:t>0.615</a:t>
             </a:r>
           </a:p>
         </p:txBody>
@@ -9823,7 +10455,7 @@
                 </a:solidFill>
                 <a:latin typeface="Consolas"/>
               </a:rPr>
-              <a:t>1.000</a:t>
+              <a:t>0.615</a:t>
             </a:r>
           </a:p>
         </p:txBody>
@@ -9862,7 +10494,7 @@
                 </a:solidFill>
                 <a:latin typeface="Consolas"/>
               </a:rPr>
-              <a:t>7/8</a:t>
+              <a:t>0/13</a:t>
             </a:r>
           </a:p>
         </p:txBody>
@@ -9901,7 +10533,7 @@
                 </a:solidFill>
                 <a:latin typeface="Consolas"/>
               </a:rPr>
-              <a:t>S04</a:t>
+              <a:t>S08</a:t>
             </a:r>
           </a:p>
         </p:txBody>
@@ -9940,7 +10572,7 @@
                 </a:solidFill>
                 <a:latin typeface="Consolas"/>
               </a:rPr>
-              <a:t>0.250</a:t>
+              <a:t>0.625</a:t>
             </a:r>
           </a:p>
         </p:txBody>
@@ -9979,7 +10611,7 @@
                 </a:solidFill>
                 <a:latin typeface="Consolas"/>
               </a:rPr>
-              <a:t>0.500</a:t>
+              <a:t>0.625</a:t>
             </a:r>
           </a:p>
         </p:txBody>
@@ -10018,7 +10650,7 @@
                 </a:solidFill>
                 <a:latin typeface="Consolas"/>
               </a:rPr>
-              <a:t>8/16</a:t>
+              <a:t>0/16</a:t>
             </a:r>
           </a:p>
         </p:txBody>
@@ -10057,7 +10689,7 @@
                 </a:solidFill>
                 <a:latin typeface="Consolas"/>
               </a:rPr>
-              <a:t>S05</a:t>
+              <a:t>P01</a:t>
             </a:r>
           </a:p>
         </p:txBody>
@@ -10096,7 +10728,7 @@
                 </a:solidFill>
                 <a:latin typeface="Consolas"/>
               </a:rPr>
-              <a:t>0.400</a:t>
+              <a:t>0.632</a:t>
             </a:r>
           </a:p>
         </p:txBody>
@@ -10135,7 +10767,7 @@
                 </a:solidFill>
                 <a:latin typeface="Consolas"/>
               </a:rPr>
-              <a:t>0.545</a:t>
+              <a:t>0.632</a:t>
             </a:r>
           </a:p>
         </p:txBody>
@@ -10174,7 +10806,7 @@
                 </a:solidFill>
                 <a:latin typeface="Consolas"/>
               </a:rPr>
-              <a:t>4/15</a:t>
+              <a:t>0/19</a:t>
             </a:r>
           </a:p>
         </p:txBody>
@@ -10213,7 +10845,7 @@
                 </a:solidFill>
                 <a:latin typeface="Consolas"/>
               </a:rPr>
-              <a:t>S06</a:t>
+              <a:t>S09</a:t>
             </a:r>
           </a:p>
         </p:txBody>
@@ -10252,7 +10884,7 @@
                 </a:solidFill>
                 <a:latin typeface="Consolas"/>
               </a:rPr>
-              <a:t>0.418</a:t>
+              <a:t>0.667</a:t>
             </a:r>
           </a:p>
         </p:txBody>
@@ -10291,7 +10923,7 @@
                 </a:solidFill>
                 <a:latin typeface="Consolas"/>
               </a:rPr>
-              <a:t>0.976</a:t>
+              <a:t>0.667</a:t>
             </a:r>
           </a:p>
         </p:txBody>
@@ -10330,7 +10962,7 @@
                 </a:solidFill>
                 <a:latin typeface="Consolas"/>
               </a:rPr>
-              <a:t>8/14</a:t>
+              <a:t>0/15</a:t>
             </a:r>
           </a:p>
         </p:txBody>
@@ -10369,7 +11001,7 @@
                 </a:solidFill>
                 <a:latin typeface="Consolas"/>
               </a:rPr>
-              <a:t>S03</a:t>
+              <a:t>MECH</a:t>
             </a:r>
           </a:p>
         </p:txBody>
@@ -10408,7 +11040,7 @@
                 </a:solidFill>
                 <a:latin typeface="Consolas"/>
               </a:rPr>
-              <a:t>0.438</a:t>
+              <a:t>0.733</a:t>
             </a:r>
           </a:p>
         </p:txBody>
@@ -10447,7 +11079,7 @@
                 </a:solidFill>
                 <a:latin typeface="Consolas"/>
               </a:rPr>
-              <a:t>0.700</a:t>
+              <a:t>0.733</a:t>
             </a:r>
           </a:p>
         </p:txBody>
@@ -10486,7 +11118,7 @@
                 </a:solidFill>
                 <a:latin typeface="Consolas"/>
               </a:rPr>
-              <a:t>6/16</a:t>
+              <a:t>0/30</a:t>
             </a:r>
           </a:p>
         </p:txBody>
@@ -10525,7 +11157,7 @@
                 </a:solidFill>
                 <a:latin typeface="Consolas"/>
               </a:rPr>
-              <a:t>MECH</a:t>
+              <a:t>S03</a:t>
             </a:r>
           </a:p>
         </p:txBody>
@@ -10564,7 +11196,7 @@
                 </a:solidFill>
                 <a:latin typeface="Consolas"/>
               </a:rPr>
-              <a:t>0.454</a:t>
+              <a:t>0.750</a:t>
             </a:r>
           </a:p>
         </p:txBody>
@@ -10603,7 +11235,7 @@
                 </a:solidFill>
                 <a:latin typeface="Consolas"/>
               </a:rPr>
-              <a:t>0.757</a:t>
+              <a:t>0.750</a:t>
             </a:r>
           </a:p>
         </p:txBody>
@@ -10642,7 +11274,7 @@
                 </a:solidFill>
                 <a:latin typeface="Consolas"/>
               </a:rPr>
-              <a:t>12/30</a:t>
+              <a:t>0/16</a:t>
             </a:r>
           </a:p>
         </p:txBody>
@@ -10681,7 +11313,7 @@
                 </a:solidFill>
                 <a:latin typeface="Consolas"/>
               </a:rPr>
-              <a:t>P02</a:t>
+              <a:t>I01</a:t>
             </a:r>
           </a:p>
         </p:txBody>
@@ -10720,7 +11352,7 @@
                 </a:solidFill>
                 <a:latin typeface="Consolas"/>
               </a:rPr>
-              <a:t>0.615</a:t>
+              <a:t>0.795</a:t>
             </a:r>
           </a:p>
         </p:txBody>
@@ -10759,7 +11391,7 @@
                 </a:solidFill>
                 <a:latin typeface="Consolas"/>
               </a:rPr>
-              <a:t>0.615</a:t>
+              <a:t>0.795</a:t>
             </a:r>
           </a:p>
         </p:txBody>
@@ -10837,7 +11469,7 @@
                 </a:solidFill>
                 <a:latin typeface="Consolas"/>
               </a:rPr>
-              <a:t>S08</a:t>
+              <a:t>S04</a:t>
             </a:r>
           </a:p>
         </p:txBody>
@@ -10876,7 +11508,7 @@
                 </a:solidFill>
                 <a:latin typeface="Consolas"/>
               </a:rPr>
-              <a:t>0.625</a:t>
+              <a:t>0.812</a:t>
             </a:r>
           </a:p>
         </p:txBody>
@@ -10915,7 +11547,7 @@
                 </a:solidFill>
                 <a:latin typeface="Consolas"/>
               </a:rPr>
-              <a:t>0.714</a:t>
+              <a:t>0.812</a:t>
             </a:r>
           </a:p>
         </p:txBody>
@@ -10954,326 +11586,14 @@
                 </a:solidFill>
                 <a:latin typeface="Consolas"/>
               </a:rPr>
-              <a:t>2/16</a:t>
-            </a:r>
-          </a:p>
-        </p:txBody>
-      </p:sp>
-      <p:sp>
-        <p:nvSpPr>
-          <p:cNvPr id="48" name="TextBox 47"/>
-          <p:cNvSpPr txBox="1"/>
-          <p:nvPr/>
-        </p:nvSpPr>
-        <p:spPr>
-          <a:xfrm>
-            <a:off x="868680" y="6656831"/>
-            <a:ext cx="1280160" cy="274320"/>
-          </a:xfrm>
-          <a:prstGeom prst="rect">
-            <a:avLst/>
-          </a:prstGeom>
-          <a:noFill/>
-        </p:spPr>
-        <p:txBody>
-          <a:bodyPr wrap="square" lIns="0" rIns="0" tIns="0" bIns="0" anchor="t">
-            <a:spAutoFit/>
-          </a:bodyPr>
-          <a:lstStyle/>
-          <a:p>
-            <a:pPr algn="l">
-              <a:spcAft>
-                <a:spcPts val="0"/>
-              </a:spcAft>
-            </a:pPr>
-            <a:r>
-              <a:rPr sz="1300" b="1" i="0">
-                <a:solidFill>
-                  <a:srgbClr val="15242E"/>
-                </a:solidFill>
-                <a:latin typeface="Consolas"/>
-              </a:rPr>
-              <a:t>P01</a:t>
-            </a:r>
-          </a:p>
-        </p:txBody>
-      </p:sp>
-      <p:sp>
-        <p:nvSpPr>
-          <p:cNvPr id="49" name="TextBox 48"/>
-          <p:cNvSpPr txBox="1"/>
-          <p:nvPr/>
-        </p:nvSpPr>
-        <p:spPr>
-          <a:xfrm>
-            <a:off x="2331720" y="6656831"/>
-            <a:ext cx="1280160" cy="274320"/>
-          </a:xfrm>
-          <a:prstGeom prst="rect">
-            <a:avLst/>
-          </a:prstGeom>
-          <a:noFill/>
-        </p:spPr>
-        <p:txBody>
-          <a:bodyPr wrap="square" lIns="0" rIns="0" tIns="0" bIns="0" anchor="t">
-            <a:spAutoFit/>
-          </a:bodyPr>
-          <a:lstStyle/>
-          <a:p>
-            <a:pPr algn="l">
-              <a:spcAft>
-                <a:spcPts val="0"/>
-              </a:spcAft>
-            </a:pPr>
-            <a:r>
-              <a:rPr sz="1300" b="0" i="0">
-                <a:solidFill>
-                  <a:srgbClr val="15242E"/>
-                </a:solidFill>
-                <a:latin typeface="Consolas"/>
-              </a:rPr>
-              <a:t>0.632</a:t>
-            </a:r>
-          </a:p>
-        </p:txBody>
-      </p:sp>
-      <p:sp>
-        <p:nvSpPr>
-          <p:cNvPr id="50" name="TextBox 49"/>
-          <p:cNvSpPr txBox="1"/>
-          <p:nvPr/>
-        </p:nvSpPr>
-        <p:spPr>
-          <a:xfrm>
-            <a:off x="3794760" y="6656831"/>
-            <a:ext cx="1280160" cy="274320"/>
-          </a:xfrm>
-          <a:prstGeom prst="rect">
-            <a:avLst/>
-          </a:prstGeom>
-          <a:noFill/>
-        </p:spPr>
-        <p:txBody>
-          <a:bodyPr wrap="square" lIns="0" rIns="0" tIns="0" bIns="0" anchor="t">
-            <a:spAutoFit/>
-          </a:bodyPr>
-          <a:lstStyle/>
-          <a:p>
-            <a:pPr algn="l">
-              <a:spcAft>
-                <a:spcPts val="0"/>
-              </a:spcAft>
-            </a:pPr>
-            <a:r>
-              <a:rPr sz="1300" b="1" i="0">
-                <a:solidFill>
-                  <a:srgbClr val="0E7C7B"/>
-                </a:solidFill>
-                <a:latin typeface="Consolas"/>
-              </a:rPr>
-              <a:t>0.632</a:t>
-            </a:r>
-          </a:p>
-        </p:txBody>
-      </p:sp>
-      <p:sp>
-        <p:nvSpPr>
-          <p:cNvPr id="51" name="TextBox 50"/>
-          <p:cNvSpPr txBox="1"/>
-          <p:nvPr/>
-        </p:nvSpPr>
-        <p:spPr>
-          <a:xfrm>
-            <a:off x="5806440" y="6656831"/>
-            <a:ext cx="1463040" cy="274320"/>
-          </a:xfrm>
-          <a:prstGeom prst="rect">
-            <a:avLst/>
-          </a:prstGeom>
-          <a:noFill/>
-        </p:spPr>
-        <p:txBody>
-          <a:bodyPr wrap="square" lIns="0" rIns="0" tIns="0" bIns="0" anchor="t">
-            <a:spAutoFit/>
-          </a:bodyPr>
-          <a:lstStyle/>
-          <a:p>
-            <a:pPr algn="l">
-              <a:spcAft>
-                <a:spcPts val="0"/>
-              </a:spcAft>
-            </a:pPr>
-            <a:r>
-              <a:rPr sz="1300" b="0" i="0">
-                <a:solidFill>
-                  <a:srgbClr val="E2725B"/>
-                </a:solidFill>
-                <a:latin typeface="Consolas"/>
-              </a:rPr>
-              <a:t>0/19</a:t>
-            </a:r>
-          </a:p>
-        </p:txBody>
-      </p:sp>
-      <p:sp>
-        <p:nvSpPr>
-          <p:cNvPr id="52" name="TextBox 51"/>
-          <p:cNvSpPr txBox="1"/>
-          <p:nvPr/>
-        </p:nvSpPr>
-        <p:spPr>
-          <a:xfrm>
-            <a:off x="868680" y="7004303"/>
-            <a:ext cx="1280160" cy="274320"/>
-          </a:xfrm>
-          <a:prstGeom prst="rect">
-            <a:avLst/>
-          </a:prstGeom>
-          <a:noFill/>
-        </p:spPr>
-        <p:txBody>
-          <a:bodyPr wrap="square" lIns="0" rIns="0" tIns="0" bIns="0" anchor="t">
-            <a:spAutoFit/>
-          </a:bodyPr>
-          <a:lstStyle/>
-          <a:p>
-            <a:pPr algn="l">
-              <a:spcAft>
-                <a:spcPts val="0"/>
-              </a:spcAft>
-            </a:pPr>
-            <a:r>
-              <a:rPr sz="1300" b="1" i="0">
-                <a:solidFill>
-                  <a:srgbClr val="15242E"/>
-                </a:solidFill>
-                <a:latin typeface="Consolas"/>
-              </a:rPr>
-              <a:t>S09</a:t>
-            </a:r>
-          </a:p>
-        </p:txBody>
-      </p:sp>
-      <p:sp>
-        <p:nvSpPr>
-          <p:cNvPr id="53" name="TextBox 52"/>
-          <p:cNvSpPr txBox="1"/>
-          <p:nvPr/>
-        </p:nvSpPr>
-        <p:spPr>
-          <a:xfrm>
-            <a:off x="2331720" y="7004303"/>
-            <a:ext cx="1280160" cy="274320"/>
-          </a:xfrm>
-          <a:prstGeom prst="rect">
-            <a:avLst/>
-          </a:prstGeom>
-          <a:noFill/>
-        </p:spPr>
-        <p:txBody>
-          <a:bodyPr wrap="square" lIns="0" rIns="0" tIns="0" bIns="0" anchor="t">
-            <a:spAutoFit/>
-          </a:bodyPr>
-          <a:lstStyle/>
-          <a:p>
-            <a:pPr algn="l">
-              <a:spcAft>
-                <a:spcPts val="0"/>
-              </a:spcAft>
-            </a:pPr>
-            <a:r>
-              <a:rPr sz="1300" b="0" i="0">
-                <a:solidFill>
-                  <a:srgbClr val="15242E"/>
-                </a:solidFill>
-                <a:latin typeface="Consolas"/>
-              </a:rPr>
-              <a:t>0.733</a:t>
-            </a:r>
-          </a:p>
-        </p:txBody>
-      </p:sp>
-      <p:sp>
-        <p:nvSpPr>
-          <p:cNvPr id="54" name="TextBox 53"/>
-          <p:cNvSpPr txBox="1"/>
-          <p:nvPr/>
-        </p:nvSpPr>
-        <p:spPr>
-          <a:xfrm>
-            <a:off x="3794760" y="7004303"/>
-            <a:ext cx="1280160" cy="274320"/>
-          </a:xfrm>
-          <a:prstGeom prst="rect">
-            <a:avLst/>
-          </a:prstGeom>
-          <a:noFill/>
-        </p:spPr>
-        <p:txBody>
-          <a:bodyPr wrap="square" lIns="0" rIns="0" tIns="0" bIns="0" anchor="t">
-            <a:spAutoFit/>
-          </a:bodyPr>
-          <a:lstStyle/>
-          <a:p>
-            <a:pPr algn="l">
-              <a:spcAft>
-                <a:spcPts val="0"/>
-              </a:spcAft>
-            </a:pPr>
-            <a:r>
-              <a:rPr sz="1300" b="1" i="0">
-                <a:solidFill>
-                  <a:srgbClr val="0E7C7B"/>
-                </a:solidFill>
-                <a:latin typeface="Consolas"/>
-              </a:rPr>
-              <a:t>0.786</a:t>
-            </a:r>
-          </a:p>
-        </p:txBody>
-      </p:sp>
-      <p:sp>
-        <p:nvSpPr>
-          <p:cNvPr id="55" name="TextBox 54"/>
-          <p:cNvSpPr txBox="1"/>
-          <p:nvPr/>
-        </p:nvSpPr>
-        <p:spPr>
-          <a:xfrm>
-            <a:off x="5806440" y="7004303"/>
-            <a:ext cx="1463040" cy="274320"/>
-          </a:xfrm>
-          <a:prstGeom prst="rect">
-            <a:avLst/>
-          </a:prstGeom>
-          <a:noFill/>
-        </p:spPr>
-        <p:txBody>
-          <a:bodyPr wrap="square" lIns="0" rIns="0" tIns="0" bIns="0" anchor="t">
-            <a:spAutoFit/>
-          </a:bodyPr>
-          <a:lstStyle/>
-          <a:p>
-            <a:pPr algn="l">
-              <a:spcAft>
-                <a:spcPts val="0"/>
-              </a:spcAft>
-            </a:pPr>
-            <a:r>
-              <a:rPr sz="1300" b="0" i="0">
-                <a:solidFill>
-                  <a:srgbClr val="E2725B"/>
-                </a:solidFill>
-                <a:latin typeface="Consolas"/>
-              </a:rPr>
-              <a:t>1/15</a:t>
-            </a:r>
-          </a:p>
-        </p:txBody>
-      </p:sp>
-      <p:sp>
-        <p:nvSpPr>
-          <p:cNvPr id="56" name="Rounded Rectangle 55"/>
+              <a:t>0/16</a:t>
+            </a:r>
+          </a:p>
+        </p:txBody>
+      </p:sp>
+      <p:sp>
+        <p:nvSpPr>
+          <p:cNvPr id="48" name="Rounded Rectangle 47"/>
           <p:cNvSpPr/>
           <p:nvPr/>
         </p:nvSpPr>
@@ -11321,7 +11641,7 @@
       </p:sp>
       <p:sp>
         <p:nvSpPr>
-          <p:cNvPr id="57" name="TextBox 56"/>
+          <p:cNvPr id="49" name="TextBox 48"/>
           <p:cNvSpPr txBox="1"/>
           <p:nvPr/>
         </p:nvSpPr>
@@ -11360,7 +11680,7 @@
       </p:sp>
       <p:sp>
         <p:nvSpPr>
-          <p:cNvPr id="58" name="TextBox 57"/>
+          <p:cNvPr id="50" name="TextBox 49"/>
           <p:cNvSpPr txBox="1"/>
           <p:nvPr/>
         </p:nvSpPr>
@@ -12534,7 +12854,7 @@
                 </a:solidFill>
                 <a:latin typeface="Consolas"/>
               </a:rPr>
-              <a:t>0.333</a:t>
+              <a:t>0.833</a:t>
             </a:r>
           </a:p>
         </p:txBody>
@@ -12567,13 +12887,13 @@
               </a:spcAft>
             </a:pPr>
             <a:r>
-              <a:rPr sz="1300" b="1" i="0">
-                <a:solidFill>
-                  <a:srgbClr val="E2725B"/>
-                </a:solidFill>
-                <a:latin typeface="Consolas"/>
-              </a:rPr>
-              <a:t>-0.167</a:t>
+              <a:rPr sz="1300" b="0" i="0">
+                <a:solidFill>
+                  <a:srgbClr val="5B6E7A"/>
+                </a:solidFill>
+                <a:latin typeface="Consolas"/>
+              </a:rPr>
+              <a:t>+0.333</a:t>
             </a:r>
           </a:p>
         </p:txBody>
@@ -12612,7 +12932,7 @@
                 </a:solidFill>
                 <a:latin typeface="Consolas"/>
               </a:rPr>
-              <a:t>67%</a:t>
+              <a:t>0%</a:t>
             </a:r>
           </a:p>
         </p:txBody>
@@ -12651,7 +12971,7 @@
                 </a:solidFill>
                 <a:latin typeface="Consolas"/>
               </a:rPr>
-              <a:t>+0.500</a:t>
+              <a:t>+0.333</a:t>
             </a:r>
           </a:p>
         </p:txBody>
@@ -12729,7 +13049,7 @@
                 </a:solidFill>
                 <a:latin typeface="Consolas"/>
               </a:rPr>
-              <a:t>0.167</a:t>
+              <a:t>0.500</a:t>
             </a:r>
           </a:p>
         </p:txBody>
@@ -12768,7 +13088,7 @@
                 </a:solidFill>
                 <a:latin typeface="Consolas"/>
               </a:rPr>
-              <a:t>0.333</a:t>
+              <a:t>1.000</a:t>
             </a:r>
           </a:p>
         </p:txBody>
@@ -12807,7 +13127,7 @@
                 </a:solidFill>
                 <a:latin typeface="Consolas"/>
               </a:rPr>
-              <a:t>+0.167</a:t>
+              <a:t>+0.500</a:t>
             </a:r>
           </a:p>
         </p:txBody>
@@ -12846,7 +13166,7 @@
                 </a:solidFill>
                 <a:latin typeface="Consolas"/>
               </a:rPr>
-              <a:t>67%</a:t>
+              <a:t>0%</a:t>
             </a:r>
           </a:p>
         </p:txBody>
@@ -12885,7 +13205,7 @@
                 </a:solidFill>
                 <a:latin typeface="Consolas"/>
               </a:rPr>
-              <a:t>+0.833</a:t>
+              <a:t>+0.500</a:t>
             </a:r>
           </a:p>
         </p:txBody>
@@ -13002,7 +13322,7 @@
                 </a:solidFill>
                 <a:latin typeface="Consolas"/>
               </a:rPr>
-              <a:t>0.500</a:t>
+              <a:t>0.667</a:t>
             </a:r>
           </a:p>
         </p:txBody>
@@ -13041,7 +13361,7 @@
                 </a:solidFill>
                 <a:latin typeface="Consolas"/>
               </a:rPr>
-              <a:t>+0.167</a:t>
+              <a:t>+0.333</a:t>
             </a:r>
           </a:p>
         </p:txBody>
@@ -13080,7 +13400,7 @@
                 </a:solidFill>
                 <a:latin typeface="Consolas"/>
               </a:rPr>
-              <a:t>33%</a:t>
+              <a:t>0%</a:t>
             </a:r>
           </a:p>
         </p:txBody>
@@ -13119,7 +13439,7 @@
                 </a:solidFill>
                 <a:latin typeface="Consolas"/>
               </a:rPr>
-              <a:t>+0.417</a:t>
+              <a:t>+0.333</a:t>
             </a:r>
           </a:p>
         </p:txBody>
@@ -13431,7 +13751,7 @@
                 </a:solidFill>
                 <a:latin typeface="Consolas"/>
               </a:rPr>
-              <a:t>0.333</a:t>
+              <a:t>0.167</a:t>
             </a:r>
           </a:p>
         </p:txBody>
@@ -13509,7 +13829,7 @@
                 </a:solidFill>
                 <a:latin typeface="Consolas"/>
               </a:rPr>
-              <a:t>+0.667</a:t>
+              <a:t>+0.833</a:t>
             </a:r>
           </a:p>
         </p:txBody>
@@ -13587,7 +13907,7 @@
                 </a:solidFill>
                 <a:latin typeface="Consolas"/>
               </a:rPr>
-              <a:t>+0.667</a:t>
+              <a:t>+0.833</a:t>
             </a:r>
           </a:p>
         </p:txBody>

--- a/docs/slides/pdbthink-results-2026-09-08.pptx
+++ b/docs/slides/pdbthink-results-2026-09-08.pptx
@@ -15264,7 +15264,7 @@
                 </a:solidFill>
                 <a:latin typeface="Calibri"/>
               </a:rPr>
-              <a:t>Not curator-reviewed</a:t>
+              <a:t>A refusal is not a wrong answer</a:t>
             </a:r>
           </a:p>
         </p:txBody>
@@ -15303,7 +15303,7 @@
                 </a:solidFill>
                 <a:latin typeface="Calibri"/>
               </a:rPr>
-              <a:t>The 117-instance set is proposed, not accepted. A curator interface exists and decisions are being recorded; most of the set is pending.</a:t>
+              <a:t>GPT-6 Astra produced no unparseable answer in 247 renders. Its eleven zeros are refusals on context-only controls — asked a question with no coordinates supplied, it replied that the answer cannot be determined, which is correct. Its floor on those families measures declining to guess, not guessing badly.</a:t>
             </a:r>
           </a:p>
         </p:txBody>
@@ -15342,7 +15342,7 @@
                 </a:solidFill>
                 <a:latin typeface="Calibri"/>
               </a:rPr>
-              <a:t>One completion per prompt</a:t>
+              <a:t>Not curator-reviewed</a:t>
             </a:r>
           </a:p>
         </p:txBody>
@@ -15381,7 +15381,7 @@
                 </a:solidFill>
                 <a:latin typeface="Calibri"/>
               </a:rPr>
-              <a:t>The protocol calls for three, and ten on a reliability subset. Intervals here cover benchmark composition only, not model stochasticity.</a:t>
+              <a:t>The 117-instance set is proposed, not accepted. A curator interface exists and decisions are being recorded; most of the set is pending.</a:t>
             </a:r>
           </a:p>
         </p:txBody>
@@ -15420,7 +15420,7 @@
                 </a:solidFill>
                 <a:latin typeface="Calibri"/>
               </a:rPr>
-              <a:t>Three runs are incomplete</a:t>
+              <a:t>One completion per prompt</a:t>
             </a:r>
           </a:p>
         </p:txBody>
@@ -15459,7 +15459,7 @@
                 </a:solidFill>
                 <a:latin typeface="Calibri"/>
               </a:rPr>
-              <a:t>A credit limit cut them off mid-batch. They cover different family subsets and are excluded from comparison rather than presented.</a:t>
+              <a:t>The protocol calls for three, and ten on a reliability subset. Intervals here cover benchmark composition only, not model stochasticity.</a:t>
             </a:r>
           </a:p>
         </p:txBody>
@@ -15498,7 +15498,7 @@
                 </a:solidFill>
                 <a:latin typeface="Calibri"/>
               </a:rPr>
-              <a:t>Budgets differ by model</a:t>
+              <a:t>Three runs are incomplete</a:t>
             </a:r>
           </a:p>
         </p:txBody>
@@ -15537,7 +15537,7 @@
                 </a:solidFill>
                 <a:latin typeface="Calibri"/>
               </a:rPr>
-              <a:t>Each model got the largest output budget its context allows beside an 87,500-token prompt — gpt-oss 32,768 against Kimi's 65,536. Compare truncation counts, not only scores.</a:t>
+              <a:t>A credit limit cut them off mid-batch. They cover different family subsets and are excluded from comparison rather than presented.</a:t>
             </a:r>
           </a:p>
         </p:txBody>
@@ -15576,6 +15576,84 @@
                 </a:solidFill>
                 <a:latin typeface="Calibri"/>
               </a:rPr>
+              <a:t>Budgets differ by model</a:t>
+            </a:r>
+          </a:p>
+        </p:txBody>
+      </p:sp>
+      <p:sp>
+        <p:nvSpPr>
+          <p:cNvPr id="14" name="TextBox 13"/>
+          <p:cNvSpPr txBox="1"/>
+          <p:nvPr/>
+        </p:nvSpPr>
+        <p:spPr>
+          <a:xfrm>
+            <a:off x="4480560" y="5175504"/>
+            <a:ext cx="6949440" cy="640080"/>
+          </a:xfrm>
+          <a:prstGeom prst="rect">
+            <a:avLst/>
+          </a:prstGeom>
+          <a:noFill/>
+        </p:spPr>
+        <p:txBody>
+          <a:bodyPr wrap="square" lIns="0" rIns="0" tIns="0" bIns="0" anchor="t">
+            <a:spAutoFit/>
+          </a:bodyPr>
+          <a:lstStyle/>
+          <a:p>
+            <a:pPr algn="l">
+              <a:spcAft>
+                <a:spcPts val="0"/>
+              </a:spcAft>
+            </a:pPr>
+            <a:r>
+              <a:rPr sz="1250" b="0" i="0">
+                <a:solidFill>
+                  <a:srgbClr val="5B6E7A"/>
+                </a:solidFill>
+                <a:latin typeface="Calibri"/>
+              </a:rPr>
+              <a:t>Each model got the largest output budget its context allows beside an 87,500-token prompt — gpt-oss 32,768 against Kimi's 65,536. Compare truncation counts, not only scores.</a:t>
+            </a:r>
+          </a:p>
+        </p:txBody>
+      </p:sp>
+      <p:sp>
+        <p:nvSpPr>
+          <p:cNvPr id="15" name="TextBox 14"/>
+          <p:cNvSpPr txBox="1"/>
+          <p:nvPr/>
+        </p:nvSpPr>
+        <p:spPr>
+          <a:xfrm>
+            <a:off x="1051560" y="6035040"/>
+            <a:ext cx="3200400" cy="365760"/>
+          </a:xfrm>
+          <a:prstGeom prst="rect">
+            <a:avLst/>
+          </a:prstGeom>
+          <a:noFill/>
+        </p:spPr>
+        <p:txBody>
+          <a:bodyPr wrap="square" lIns="0" rIns="0" tIns="0" bIns="0" anchor="t">
+            <a:spAutoFit/>
+          </a:bodyPr>
+          <a:lstStyle/>
+          <a:p>
+            <a:pPr algn="l">
+              <a:spcAft>
+                <a:spcPts val="0"/>
+              </a:spcAft>
+            </a:pPr>
+            <a:r>
+              <a:rPr sz="1350" b="1" i="0">
+                <a:solidFill>
+                  <a:srgbClr val="E2725B"/>
+                </a:solidFill>
+                <a:latin typeface="Calibri"/>
+              </a:rPr>
               <a:t>S02 is thin, and narrow</a:t>
             </a:r>
           </a:p>
@@ -15583,13 +15661,13 @@
       </p:sp>
       <p:sp>
         <p:nvSpPr>
-          <p:cNvPr id="14" name="TextBox 13"/>
-          <p:cNvSpPr txBox="1"/>
-          <p:nvPr/>
-        </p:nvSpPr>
-        <p:spPr>
-          <a:xfrm>
-            <a:off x="4480560" y="5175504"/>
+          <p:cNvPr id="16" name="TextBox 15"/>
+          <p:cNvSpPr txBox="1"/>
+          <p:nvPr/>
+        </p:nvSpPr>
+        <p:spPr>
+          <a:xfrm>
+            <a:off x="4480560" y="6035040"/>
             <a:ext cx="6949440" cy="640080"/>
           </a:xfrm>
           <a:prstGeom prst="rect">
